--- a/doc/slides/db-for-business.pptx
+++ b/doc/slides/db-for-business.pptx
@@ -17248,7 +17248,7 @@
                 <a:cs typeface="Meiryo"/>
                 <a:ea typeface="Meiryo"/>
               </a:rPr>
-              <a:t>アレルギーは第3章の世帯構成員に専用の項目を作りました。持病・服薬・かかりつけ医は「注意点」に文章で書く形でよいですか。項目として独立させるべきですか</a:t>
+              <a:t>アレルギーは第3章の世帯構成員に専用の項目があります。持病・服薬・かかりつけ医は「注意点」に文章で書く形でよいですか。項目として独立させるべきですか</a:t>
             </a:r>
           </a:p>
         </p:txBody>

--- a/doc/slides/db-for-business.pptx
+++ b/doc/slides/db-for-business.pptx
@@ -47906,7 +47906,7 @@
         <p:spPr>
           <a:xfrm>
             <a:off x="457200" y="1718690"/>
-            <a:ext cx="11277295" cy="721614"/>
+            <a:ext cx="11277295" cy="931164"/>
           </a:xfrm>
           <a:prstGeom prst="roundRect">
             <a:avLst>
@@ -47954,7 +47954,7 @@
         <p:spPr>
           <a:xfrm>
             <a:off x="457200" y="1718690"/>
-            <a:ext cx="68580" cy="721614"/>
+            <a:ext cx="68580" cy="931164"/>
           </a:xfrm>
           <a:prstGeom prst="rect">
             <a:avLst/>
@@ -48113,7 +48113,7 @@
         <p:spPr>
           <a:xfrm>
             <a:off x="658368" y="2066162"/>
-            <a:ext cx="10874959" cy="300990"/>
+            <a:ext cx="10874959" cy="510540"/>
           </a:xfrm>
           <a:prstGeom prst="rect">
             <a:avLst/>
@@ -48141,7 +48141,7 @@
                 <a:cs typeface="Meiryo"/>
                 <a:ea typeface="Meiryo"/>
               </a:rPr>
-              <a:t>文面の種類(日報・日報の文体・事故報告・ヒヤリハットの助言・領収書の読み取り) / 版番号 / 本文 / 変更メモ / 編集した人 / 保存日時</a:t>
+              <a:t>文面の種類(日報生成・日報の文体ルール[未接続]・事故報告生成・領収書の読み取り・日報メモ欄の入力例・事故報告メモ欄の入力例・事故報告の記載要領・ヒヤリハットの記載要領) / 版番号 / 本文 / 変更メモ / 編集した人 / 保存日時</a:t>
             </a:r>
           </a:p>
         </p:txBody>
@@ -48154,7 +48154,7 @@
         </p:nvSpPr>
         <p:spPr>
           <a:xfrm>
-            <a:off x="457200" y="2568321"/>
+            <a:off x="457200" y="2777870"/>
             <a:ext cx="11277295" cy="721614"/>
           </a:xfrm>
           <a:prstGeom prst="roundRect">
@@ -48202,7 +48202,7 @@
         </p:nvSpPr>
         <p:spPr>
           <a:xfrm>
-            <a:off x="457200" y="2568321"/>
+            <a:off x="457200" y="2777870"/>
             <a:ext cx="68580" cy="721614"/>
           </a:xfrm>
           <a:prstGeom prst="rect">
@@ -48246,7 +48246,7 @@
         </p:nvSpPr>
         <p:spPr>
           <a:xfrm>
-            <a:off x="658368" y="2641473"/>
+            <a:off x="658368" y="2851023"/>
             <a:ext cx="6705295" cy="256032"/>
           </a:xfrm>
           <a:prstGeom prst="rect">
@@ -48299,7 +48299,7 @@
         </p:nvSpPr>
         <p:spPr>
           <a:xfrm>
-            <a:off x="10083241" y="2641473"/>
+            <a:off x="10083241" y="2851023"/>
             <a:ext cx="1504950" cy="237744"/>
           </a:xfrm>
           <a:prstGeom prst="roundRect">
@@ -48361,7 +48361,7 @@
         </p:nvSpPr>
         <p:spPr>
           <a:xfrm>
-            <a:off x="658368" y="2915793"/>
+            <a:off x="658368" y="3125342"/>
             <a:ext cx="10874959" cy="300990"/>
           </a:xfrm>
           <a:prstGeom prst="rect">
@@ -48403,7 +48403,7 @@
         </p:nvSpPr>
         <p:spPr>
           <a:xfrm>
-            <a:off x="457200" y="3417951"/>
+            <a:off x="457200" y="3627500"/>
             <a:ext cx="11277295" cy="721614"/>
           </a:xfrm>
           <a:prstGeom prst="roundRect">
@@ -48451,7 +48451,7 @@
         </p:nvSpPr>
         <p:spPr>
           <a:xfrm>
-            <a:off x="457200" y="3417951"/>
+            <a:off x="457200" y="3627500"/>
             <a:ext cx="68580" cy="721614"/>
           </a:xfrm>
           <a:prstGeom prst="rect">
@@ -48495,7 +48495,7 @@
         </p:nvSpPr>
         <p:spPr>
           <a:xfrm>
-            <a:off x="658368" y="3491103"/>
+            <a:off x="658368" y="3700653"/>
             <a:ext cx="6705295" cy="256032"/>
           </a:xfrm>
           <a:prstGeom prst="rect">
@@ -48548,7 +48548,7 @@
         </p:nvSpPr>
         <p:spPr>
           <a:xfrm>
-            <a:off x="10137533" y="3491103"/>
+            <a:off x="10137533" y="3700653"/>
             <a:ext cx="1450657" cy="237744"/>
           </a:xfrm>
           <a:prstGeom prst="roundRect">
@@ -48610,7 +48610,7 @@
         </p:nvSpPr>
         <p:spPr>
           <a:xfrm>
-            <a:off x="658368" y="3765423"/>
+            <a:off x="658368" y="3974972"/>
             <a:ext cx="10874959" cy="300990"/>
           </a:xfrm>
           <a:prstGeom prst="rect">
@@ -48652,7 +48652,7 @@
         </p:nvSpPr>
         <p:spPr>
           <a:xfrm>
-            <a:off x="457200" y="4267581"/>
+            <a:off x="457200" y="4477131"/>
             <a:ext cx="11277295" cy="721614"/>
           </a:xfrm>
           <a:prstGeom prst="roundRect">
@@ -48700,7 +48700,7 @@
         </p:nvSpPr>
         <p:spPr>
           <a:xfrm>
-            <a:off x="457200" y="4267581"/>
+            <a:off x="457200" y="4477131"/>
             <a:ext cx="68580" cy="721614"/>
           </a:xfrm>
           <a:prstGeom prst="rect">
@@ -48744,7 +48744,7 @@
         </p:nvSpPr>
         <p:spPr>
           <a:xfrm>
-            <a:off x="658368" y="4340733"/>
+            <a:off x="658368" y="4550283"/>
             <a:ext cx="6705295" cy="256032"/>
           </a:xfrm>
           <a:prstGeom prst="rect">
@@ -48797,7 +48797,7 @@
         </p:nvSpPr>
         <p:spPr>
           <a:xfrm>
-            <a:off x="9841941" y="4340733"/>
+            <a:off x="9841941" y="4550283"/>
             <a:ext cx="1746250" cy="237744"/>
           </a:xfrm>
           <a:prstGeom prst="roundRect">
@@ -48859,7 +48859,7 @@
         </p:nvSpPr>
         <p:spPr>
           <a:xfrm>
-            <a:off x="658368" y="4615053"/>
+            <a:off x="658368" y="4824603"/>
             <a:ext cx="10874959" cy="300990"/>
           </a:xfrm>
           <a:prstGeom prst="rect">
@@ -48901,7 +48901,7 @@
         </p:nvSpPr>
         <p:spPr>
           <a:xfrm>
-            <a:off x="457200" y="5117211"/>
+            <a:off x="457200" y="5326761"/>
             <a:ext cx="11277295" cy="721614"/>
           </a:xfrm>
           <a:prstGeom prst="roundRect">
@@ -48949,7 +48949,7 @@
         </p:nvSpPr>
         <p:spPr>
           <a:xfrm>
-            <a:off x="457200" y="5117211"/>
+            <a:off x="457200" y="5326761"/>
             <a:ext cx="68580" cy="721614"/>
           </a:xfrm>
           <a:prstGeom prst="rect">
@@ -48993,7 +48993,7 @@
         </p:nvSpPr>
         <p:spPr>
           <a:xfrm>
-            <a:off x="658368" y="5190363"/>
+            <a:off x="658368" y="5399913"/>
             <a:ext cx="6705295" cy="256032"/>
           </a:xfrm>
           <a:prstGeom prst="rect">
@@ -49046,7 +49046,7 @@
         </p:nvSpPr>
         <p:spPr>
           <a:xfrm>
-            <a:off x="10499483" y="5190363"/>
+            <a:off x="10499483" y="5399913"/>
             <a:ext cx="1088707" cy="237744"/>
           </a:xfrm>
           <a:prstGeom prst="roundRect">
@@ -49108,7 +49108,7 @@
         </p:nvSpPr>
         <p:spPr>
           <a:xfrm>
-            <a:off x="658368" y="5464682"/>
+            <a:off x="658368" y="5674233"/>
             <a:ext cx="10874959" cy="300990"/>
           </a:xfrm>
           <a:prstGeom prst="rect">
@@ -49375,7 +49375,7 @@
         <p:spPr>
           <a:xfrm>
             <a:off x="457200" y="1115568"/>
-            <a:ext cx="5547207" cy="2176907"/>
+            <a:ext cx="5547207" cy="1910334"/>
           </a:xfrm>
           <a:prstGeom prst="roundRect">
             <a:avLst>
@@ -49423,7 +49423,7 @@
         <p:spPr>
           <a:xfrm>
             <a:off x="457200" y="1115568"/>
-            <a:ext cx="68580" cy="2176907"/>
+            <a:ext cx="68580" cy="1910334"/>
           </a:xfrm>
           <a:prstGeom prst="rect">
             <a:avLst/>
@@ -49509,7 +49509,7 @@
         <p:spPr>
           <a:xfrm>
             <a:off x="667512" y="1527048"/>
-            <a:ext cx="5172303" cy="1673987"/>
+            <a:ext cx="5172303" cy="1407414"/>
           </a:xfrm>
           <a:prstGeom prst="rect">
             <a:avLst/>
@@ -49599,32 +49599,6 @@
               <a:t>書き換えていない文面は、最初から入っている既定の文面がそのまま使われる</a:t>
             </a:r>
           </a:p>
-          <a:p>
-            <a:pPr marL="182880" indent="-182880">
-              <a:lnSpc>
-                <a:spcPct val="145000"/>
-              </a:lnSpc>
-              <a:spcBef>
-                <a:spcPts val="400"/>
-              </a:spcBef>
-              <a:buClr>
-                <a:srgbClr val="0369A1"/>
-              </a:buClr>
-              <a:buFont typeface="Meiryo"/>
-              <a:buChar char="▪"/>
-            </a:pPr>
-            <a:r>
-              <a:rPr sz="1100" b="0">
-                <a:solidFill>
-                  <a:srgbClr val="14223A"/>
-                </a:solidFill>
-                <a:latin typeface="Meiryo"/>
-                <a:cs typeface="Meiryo"/>
-                <a:ea typeface="Meiryo"/>
-              </a:rPr>
-              <a:t>保護者の負担が大きいご家庭では、教育的な言葉を使わずねぎらいに切り替える(この切り替えは文面の書き換えでは外れない形にしてある)</a:t>
-            </a:r>
-          </a:p>
         </p:txBody>
       </p:sp>
       <p:sp>
@@ -49636,7 +49610,7 @@
         <p:spPr>
           <a:xfrm>
             <a:off x="6187287" y="1115568"/>
-            <a:ext cx="5547207" cy="2176907"/>
+            <a:ext cx="5547207" cy="1910334"/>
           </a:xfrm>
           <a:prstGeom prst="roundRect">
             <a:avLst>
@@ -49684,7 +49658,7 @@
         <p:spPr>
           <a:xfrm>
             <a:off x="6187287" y="1115568"/>
-            <a:ext cx="68580" cy="2176907"/>
+            <a:ext cx="68580" cy="1910334"/>
           </a:xfrm>
           <a:prstGeom prst="rect">
             <a:avLst/>
@@ -49770,7 +49744,7 @@
         <p:spPr>
           <a:xfrm>
             <a:off x="6397599" y="1527048"/>
-            <a:ext cx="5172303" cy="1673987"/>
+            <a:ext cx="5172303" cy="1407414"/>
           </a:xfrm>
           <a:prstGeom prst="rect">
             <a:avLst/>
@@ -49805,7 +49779,7 @@
                 <a:cs typeface="Meiryo"/>
                 <a:ea typeface="Meiryo"/>
               </a:rPr>
-              <a:t>文面を編集する画面はできている。年齢帯・教育の言葉・判定基準を編集する画面はこれから</a:t>
+              <a:t>保護者の負担が大きいご家庭で教育的な言葉をねぎらいに切り替える仕組みは予定/準備済み。表と判定の仕組みはあるが、日報作成(AIへの指示文の組み立て)への接続はこれから</a:t>
             </a:r>
           </a:p>
           <a:p>
@@ -49831,6 +49805,32 @@
                 <a:cs typeface="Meiryo"/>
                 <a:ea typeface="Meiryo"/>
               </a:rPr>
+              <a:t>文面を編集する画面はできている。年齢帯・教育の言葉・判定基準を編集する画面はこれから</a:t>
+            </a:r>
+          </a:p>
+          <a:p>
+            <a:pPr marL="182880" indent="-182880">
+              <a:lnSpc>
+                <a:spcPct val="145000"/>
+              </a:lnSpc>
+              <a:spcBef>
+                <a:spcPts val="400"/>
+              </a:spcBef>
+              <a:buClr>
+                <a:srgbClr val="0369A1"/>
+              </a:buClr>
+              <a:buFont typeface="Meiryo"/>
+              <a:buChar char="▪"/>
+            </a:pPr>
+            <a:r>
+              <a:rPr sz="1100" b="0">
+                <a:solidFill>
+                  <a:srgbClr val="14223A"/>
+                </a:solidFill>
+                <a:latin typeface="Meiryo"/>
+                <a:cs typeface="Meiryo"/>
+                <a:ea typeface="Meiryo"/>
+              </a:rPr>
               <a:t>AIが作った文面の記録を、どれくらいの期間残すかが未決</a:t>
             </a:r>
           </a:p>
@@ -49844,7 +49844,7 @@
         </p:nvSpPr>
         <p:spPr>
           <a:xfrm>
-            <a:off x="457200" y="3475355"/>
+            <a:off x="457200" y="3208782"/>
             <a:ext cx="11277295" cy="274320"/>
           </a:xfrm>
           <a:prstGeom prst="rect">
@@ -49886,7 +49886,7 @@
         </p:nvSpPr>
         <p:spPr>
           <a:xfrm>
-            <a:off x="457200" y="3804539"/>
+            <a:off x="457200" y="3537966"/>
             <a:ext cx="5547207" cy="614680"/>
           </a:xfrm>
           <a:prstGeom prst="roundRect">
@@ -49932,7 +49932,7 @@
         </p:nvSpPr>
         <p:spPr>
           <a:xfrm>
-            <a:off x="548640" y="3877691"/>
+            <a:off x="548640" y="3611118"/>
             <a:ext cx="274320" cy="274320"/>
           </a:xfrm>
           <a:prstGeom prst="roundRect">
@@ -49994,7 +49994,7 @@
         </p:nvSpPr>
         <p:spPr>
           <a:xfrm>
-            <a:off x="914400" y="3895979"/>
+            <a:off x="914400" y="3629406"/>
             <a:ext cx="4980279" cy="468376"/>
           </a:xfrm>
           <a:prstGeom prst="rect">
@@ -50036,7 +50036,7 @@
         </p:nvSpPr>
         <p:spPr>
           <a:xfrm>
-            <a:off x="6187287" y="3804539"/>
+            <a:off x="6187287" y="3537966"/>
             <a:ext cx="5547207" cy="614680"/>
           </a:xfrm>
           <a:prstGeom prst="roundRect">
@@ -50082,7 +50082,7 @@
         </p:nvSpPr>
         <p:spPr>
           <a:xfrm>
-            <a:off x="6278727" y="3877691"/>
+            <a:off x="6278727" y="3611118"/>
             <a:ext cx="274320" cy="274320"/>
           </a:xfrm>
           <a:prstGeom prst="roundRect">
@@ -50144,7 +50144,7 @@
         </p:nvSpPr>
         <p:spPr>
           <a:xfrm>
-            <a:off x="6644487" y="3895979"/>
+            <a:off x="6644487" y="3629406"/>
             <a:ext cx="4980279" cy="468376"/>
           </a:xfrm>
           <a:prstGeom prst="rect">
@@ -50186,7 +50186,7 @@
         </p:nvSpPr>
         <p:spPr>
           <a:xfrm>
-            <a:off x="457200" y="4528947"/>
+            <a:off x="457200" y="4262374"/>
             <a:ext cx="5547207" cy="614680"/>
           </a:xfrm>
           <a:prstGeom prst="roundRect">
@@ -50232,7 +50232,7 @@
         </p:nvSpPr>
         <p:spPr>
           <a:xfrm>
-            <a:off x="548640" y="4602099"/>
+            <a:off x="548640" y="4335526"/>
             <a:ext cx="274320" cy="274320"/>
           </a:xfrm>
           <a:prstGeom prst="roundRect">
@@ -50294,7 +50294,7 @@
         </p:nvSpPr>
         <p:spPr>
           <a:xfrm>
-            <a:off x="914400" y="4620387"/>
+            <a:off x="914400" y="4353814"/>
             <a:ext cx="4980279" cy="468376"/>
           </a:xfrm>
           <a:prstGeom prst="rect">
@@ -50336,7 +50336,7 @@
         </p:nvSpPr>
         <p:spPr>
           <a:xfrm>
-            <a:off x="6187287" y="4528947"/>
+            <a:off x="6187287" y="4262374"/>
             <a:ext cx="5547207" cy="614680"/>
           </a:xfrm>
           <a:prstGeom prst="roundRect">
@@ -50382,7 +50382,7 @@
         </p:nvSpPr>
         <p:spPr>
           <a:xfrm>
-            <a:off x="6278727" y="4602099"/>
+            <a:off x="6278727" y="4335526"/>
             <a:ext cx="274320" cy="274320"/>
           </a:xfrm>
           <a:prstGeom prst="roundRect">
@@ -50444,7 +50444,7 @@
         </p:nvSpPr>
         <p:spPr>
           <a:xfrm>
-            <a:off x="6644487" y="4620387"/>
+            <a:off x="6644487" y="4353814"/>
             <a:ext cx="4980279" cy="468376"/>
           </a:xfrm>
           <a:prstGeom prst="rect">
@@ -50486,7 +50486,7 @@
         </p:nvSpPr>
         <p:spPr>
           <a:xfrm>
-            <a:off x="457200" y="5253355"/>
+            <a:off x="457200" y="4986782"/>
             <a:ext cx="5547207" cy="407924"/>
           </a:xfrm>
           <a:prstGeom prst="roundRect">
@@ -50532,7 +50532,7 @@
         </p:nvSpPr>
         <p:spPr>
           <a:xfrm>
-            <a:off x="548640" y="5326507"/>
+            <a:off x="548640" y="5059934"/>
             <a:ext cx="274320" cy="274320"/>
           </a:xfrm>
           <a:prstGeom prst="roundRect">
@@ -50594,7 +50594,7 @@
         </p:nvSpPr>
         <p:spPr>
           <a:xfrm>
-            <a:off x="914400" y="5344795"/>
+            <a:off x="914400" y="5078222"/>
             <a:ext cx="4980279" cy="261619"/>
           </a:xfrm>
           <a:prstGeom prst="rect">
@@ -50636,7 +50636,7 @@
         </p:nvSpPr>
         <p:spPr>
           <a:xfrm>
-            <a:off x="6187287" y="5253355"/>
+            <a:off x="6187287" y="4986782"/>
             <a:ext cx="5547207" cy="614680"/>
           </a:xfrm>
           <a:prstGeom prst="roundRect">
@@ -50682,7 +50682,7 @@
         </p:nvSpPr>
         <p:spPr>
           <a:xfrm>
-            <a:off x="6278727" y="5326507"/>
+            <a:off x="6278727" y="5059934"/>
             <a:ext cx="274320" cy="274320"/>
           </a:xfrm>
           <a:prstGeom prst="roundRect">
@@ -50744,7 +50744,7 @@
         </p:nvSpPr>
         <p:spPr>
           <a:xfrm>
-            <a:off x="6644487" y="5344795"/>
+            <a:off x="6644487" y="5078222"/>
             <a:ext cx="4980279" cy="468376"/>
           </a:xfrm>
           <a:prstGeom prst="rect">

--- a/doc/slides/db-for-business.pptx
+++ b/doc/slides/db-for-business.pptx
@@ -6015,7 +6015,7 @@
                 <a:cs typeface="Meiryo"/>
                 <a:ea typeface="Meiryo"/>
               </a:rPr>
-              <a:t>顧客・日報・事故報告・領収書・勤怠・クーポン・AIの文面</a:t>
+              <a:t>顧客・日報・事故報告・領収書・勤怠・クーポン・AIの文面・AIの調整材料(年齢帯・教育の言葉・関心度と負担の基準・ご家庭の設定)</a:t>
             </a:r>
           </a:p>
           <a:p>
@@ -6052,7 +6052,7 @@
                 <a:cs typeface="Meiryo"/>
                 <a:ea typeface="Meiryo"/>
               </a:rPr>
-              <a:t>カルテ・予約・請求・入金・相性・移動手当・日報AIの調整材料</a:t>
+              <a:t>カルテ・予約・請求・入金・相性・移動手当</a:t>
             </a:r>
           </a:p>
           <a:p>
@@ -54154,7 +54154,7 @@
         </p:nvGraphicFramePr>
         <p:xfrm>
           <a:off x="457200" y="1115568"/>
-          <a:ext cx="11277294" cy="4334256"/>
+          <a:ext cx="11277294" cy="4023360"/>
         </p:xfrm>
         <a:graphic>
           <a:graphicData uri="http://schemas.openxmlformats.org/drawingml/2006/table">
@@ -55322,7 +55322,7 @@
                           <a:cs typeface="Meiryo"/>
                           <a:ea typeface="Meiryo"/>
                         </a:rPr>
-                        <a:t>教育への関心度(5段階)を誰がいつ付けるか / 負担の大きさ(5段階)の判定基準</a:t>
+                        <a:t>教育への関心度★・負担の大きさ(PSI)の判定基準の中身(貴社の言葉で)</a:t>
                       </a:r>
                     </a:p>
                   </a:txBody>
@@ -55352,7 +55352,7 @@
                           <a:cs typeface="Meiryo"/>
                           <a:ea typeface="Meiryo"/>
                         </a:rPr>
-                        <a:t>日報の文面を組み替える材料が揃わない</a:t>
+                        <a:t>日報の文面を組み替える材料(キーワード表・言い回し)が空のまま</a:t>
                       </a:r>
                     </a:p>
                   </a:txBody>
@@ -55363,98 +55363,6 @@
                   </a:tcPr>
                 </a:tc>
               </a:tr>
-              <a:tr h="310896">
-                <a:tc>
-                  <a:txBody>
-                    <a:bodyPr wrap="square"/>
-                    <a:lstStyle/>
-                    <a:p>
-                      <a:pPr algn="l">
-                        <a:lnSpc>
-                          <a:spcPct val="115000"/>
-                        </a:lnSpc>
-                        <a:buNone/>
-                      </a:pPr>
-                      <a:r>
-                        <a:rPr sz="1100" b="1">
-                          <a:solidFill>
-                            <a:srgbClr val="14223A"/>
-                          </a:solidFill>
-                          <a:latin typeface="Meiryo"/>
-                          <a:cs typeface="Meiryo"/>
-                          <a:ea typeface="Meiryo"/>
-                        </a:rPr>
-                        <a:t>第15章</a:t>
-                      </a:r>
-                    </a:p>
-                  </a:txBody>
-                  <a:tcPr marL="64008" marR="64008" marT="27432" marB="27432" anchor="ctr">
-                    <a:solidFill>
-                      <a:srgbClr val="FFFFFF"/>
-                    </a:solidFill>
-                  </a:tcPr>
-                </a:tc>
-                <a:tc>
-                  <a:txBody>
-                    <a:bodyPr wrap="square"/>
-                    <a:lstStyle/>
-                    <a:p>
-                      <a:pPr algn="l">
-                        <a:lnSpc>
-                          <a:spcPct val="115000"/>
-                        </a:lnSpc>
-                        <a:buNone/>
-                      </a:pPr>
-                      <a:r>
-                        <a:rPr sz="1100" b="0">
-                          <a:solidFill>
-                            <a:srgbClr val="14223A"/>
-                          </a:solidFill>
-                          <a:latin typeface="Meiryo"/>
-                          <a:cs typeface="Meiryo"/>
-                          <a:ea typeface="Meiryo"/>
-                        </a:rPr>
-                        <a:t>AIが作った文面の記録(入力メモと出力)の保持期間</a:t>
-                      </a:r>
-                    </a:p>
-                  </a:txBody>
-                  <a:tcPr marL="64008" marR="64008" marT="27432" marB="27432" anchor="ctr">
-                    <a:solidFill>
-                      <a:srgbClr val="FFFFFF"/>
-                    </a:solidFill>
-                  </a:tcPr>
-                </a:tc>
-                <a:tc>
-                  <a:txBody>
-                    <a:bodyPr wrap="square"/>
-                    <a:lstStyle/>
-                    <a:p>
-                      <a:pPr algn="l">
-                        <a:lnSpc>
-                          <a:spcPct val="115000"/>
-                        </a:lnSpc>
-                        <a:buNone/>
-                      </a:pPr>
-                      <a:r>
-                        <a:rPr sz="1100" b="0">
-                          <a:solidFill>
-                            <a:srgbClr val="14223A"/>
-                          </a:solidFill>
-                          <a:latin typeface="Meiryo"/>
-                          <a:cs typeface="Meiryo"/>
-                          <a:ea typeface="Meiryo"/>
-                        </a:rPr>
-                        <a:t>記録が際限なく溜まる</a:t>
-                      </a:r>
-                    </a:p>
-                  </a:txBody>
-                  <a:tcPr marL="64008" marR="64008" marT="27432" marB="27432" anchor="ctr">
-                    <a:solidFill>
-                      <a:srgbClr val="FFFFFF"/>
-                    </a:solidFill>
-                  </a:tcPr>
-                </a:tc>
-              </a:tr>
             </a:tbl>
           </a:graphicData>
         </a:graphic>
@@ -55586,7 +55494,7 @@
                 <a:cs typeface="Meiryo"/>
                 <a:ea typeface="Meiryo"/>
               </a:rPr>
-              <a:t>上の13件は、いずれも「業務の決めごと」であって、システムの都合ではありません。決まり次第、そのとおりに作ります。現時点で決まっているものがあれば教えてください。</a:t>
+              <a:t>上の12件は、いずれも「業務の決めごと」であって、システムの都合ではありません。決まり次第、そのとおりに作ります。現時点で決まっているものがあれば教えてください。</a:t>
             </a:r>
           </a:p>
         </p:txBody>
@@ -57790,6 +57698,32 @@
               <a:t>AIに渡す文面の編集(版の履歴・既定に戻す)</a:t>
             </a:r>
           </a:p>
+          <a:p>
+            <a:pPr marL="182880" indent="-182880">
+              <a:lnSpc>
+                <a:spcPct val="132000"/>
+              </a:lnSpc>
+              <a:spcBef>
+                <a:spcPts val="400"/>
+              </a:spcBef>
+              <a:buClr>
+                <a:srgbClr val="0369A1"/>
+              </a:buClr>
+              <a:buFont typeface="Meiryo"/>
+              <a:buChar char="▪"/>
+            </a:pPr>
+            <a:r>
+              <a:rPr sz="1100" b="0">
+                <a:solidFill>
+                  <a:srgbClr val="14223A"/>
+                </a:solidFill>
+                <a:latin typeface="Meiryo"/>
+                <a:cs typeface="Meiryo"/>
+                <a:ea typeface="Meiryo"/>
+              </a:rPr>
+              <a:t>日報AIの年齢帯・教育の言葉・判定基準・ご家庭の設定・生成の記録</a:t>
+            </a:r>
+          </a:p>
         </p:txBody>
       </p:sp>
       <p:sp>
@@ -58075,32 +58009,6 @@
                 <a:ea typeface="Meiryo"/>
               </a:rPr>
               <a:t>移動手当の単価マスタ・移動区間</a:t>
-            </a:r>
-          </a:p>
-          <a:p>
-            <a:pPr marL="182880" indent="-182880">
-              <a:lnSpc>
-                <a:spcPct val="132000"/>
-              </a:lnSpc>
-              <a:spcBef>
-                <a:spcPts val="400"/>
-              </a:spcBef>
-              <a:buClr>
-                <a:srgbClr val="0369A1"/>
-              </a:buClr>
-              <a:buFont typeface="Meiryo"/>
-              <a:buChar char="▪"/>
-            </a:pPr>
-            <a:r>
-              <a:rPr sz="1100" b="0">
-                <a:solidFill>
-                  <a:srgbClr val="14223A"/>
-                </a:solidFill>
-                <a:latin typeface="Meiryo"/>
-                <a:cs typeface="Meiryo"/>
-                <a:ea typeface="Meiryo"/>
-              </a:rPr>
-              <a:t>日報AIの年齢帯・教育の言葉・判定基準・生成の記録</a:t>
             </a:r>
           </a:p>
         </p:txBody>

--- a/doc/slides/db-for-business.pptx
+++ b/doc/slides/db-for-business.pptx
@@ -48141,7 +48141,7 @@
                 <a:cs typeface="Meiryo"/>
                 <a:ea typeface="Meiryo"/>
               </a:rPr>
-              <a:t>文面の種類(日報生成・日報の文体ルール[未接続]・事故報告生成・領収書の読み取り・日報メモ欄の入力例・事故報告メモ欄の入力例・事故報告の記載要領・ヒヤリハットの記載要領) / 版番号 / 本文 / 変更メモ / 編集した人 / 保存日時</a:t>
+              <a:t>文面の種類(日報生成・日報の文体ルール・事故報告生成・領収書の読み取り・日報メモ欄の入力例・事故報告メモ欄の入力例・事故報告の記載要領・ヒヤリハットの記載要領) / 版番号 / 本文 / 変更メモ / 編集した人 / 保存日時</a:t>
             </a:r>
           </a:p>
         </p:txBody>
@@ -49375,7 +49375,7 @@
         <p:spPr>
           <a:xfrm>
             <a:off x="457200" y="1115568"/>
-            <a:ext cx="5547207" cy="1910334"/>
+            <a:ext cx="5547207" cy="1707769"/>
           </a:xfrm>
           <a:prstGeom prst="roundRect">
             <a:avLst>
@@ -49423,7 +49423,7 @@
         <p:spPr>
           <a:xfrm>
             <a:off x="457200" y="1115568"/>
-            <a:ext cx="68580" cy="1910334"/>
+            <a:ext cx="68580" cy="1707769"/>
           </a:xfrm>
           <a:prstGeom prst="rect">
             <a:avLst/>
@@ -49509,7 +49509,7 @@
         <p:spPr>
           <a:xfrm>
             <a:off x="667512" y="1527048"/>
-            <a:ext cx="5172303" cy="1407414"/>
+            <a:ext cx="5172303" cy="1204849"/>
           </a:xfrm>
           <a:prstGeom prst="rect">
             <a:avLst/>
@@ -49610,7 +49610,7 @@
         <p:spPr>
           <a:xfrm>
             <a:off x="6187287" y="1115568"/>
-            <a:ext cx="5547207" cy="1910334"/>
+            <a:ext cx="5547207" cy="1707769"/>
           </a:xfrm>
           <a:prstGeom prst="roundRect">
             <a:avLst>
@@ -49658,7 +49658,7 @@
         <p:spPr>
           <a:xfrm>
             <a:off x="6187287" y="1115568"/>
-            <a:ext cx="68580" cy="1910334"/>
+            <a:ext cx="68580" cy="1707769"/>
           </a:xfrm>
           <a:prstGeom prst="rect">
             <a:avLst/>
@@ -49744,7 +49744,7 @@
         <p:spPr>
           <a:xfrm>
             <a:off x="6397599" y="1527048"/>
-            <a:ext cx="5172303" cy="1407414"/>
+            <a:ext cx="5172303" cy="1204849"/>
           </a:xfrm>
           <a:prstGeom prst="rect">
             <a:avLst/>
@@ -49779,59 +49779,7 @@
                 <a:cs typeface="Meiryo"/>
                 <a:ea typeface="Meiryo"/>
               </a:rPr>
-              <a:t>保護者の負担が大きいご家庭で教育的な言葉をねぎらいに切り替える仕組みは予定/準備済み。表と判定の仕組みはあるが、日報作成(AIへの指示文の組み立て)への接続はこれから</a:t>
-            </a:r>
-          </a:p>
-          <a:p>
-            <a:pPr marL="182880" indent="-182880">
-              <a:lnSpc>
-                <a:spcPct val="145000"/>
-              </a:lnSpc>
-              <a:spcBef>
-                <a:spcPts val="400"/>
-              </a:spcBef>
-              <a:buClr>
-                <a:srgbClr val="0369A1"/>
-              </a:buClr>
-              <a:buFont typeface="Meiryo"/>
-              <a:buChar char="▪"/>
-            </a:pPr>
-            <a:r>
-              <a:rPr sz="1100" b="0">
-                <a:solidFill>
-                  <a:srgbClr val="14223A"/>
-                </a:solidFill>
-                <a:latin typeface="Meiryo"/>
-                <a:cs typeface="Meiryo"/>
-                <a:ea typeface="Meiryo"/>
-              </a:rPr>
-              <a:t>文面を編集する画面はできている。年齢帯・教育の言葉・判定基準を編集する画面はこれから</a:t>
-            </a:r>
-          </a:p>
-          <a:p>
-            <a:pPr marL="182880" indent="-182880">
-              <a:lnSpc>
-                <a:spcPct val="145000"/>
-              </a:lnSpc>
-              <a:spcBef>
-                <a:spcPts val="400"/>
-              </a:spcBef>
-              <a:buClr>
-                <a:srgbClr val="0369A1"/>
-              </a:buClr>
-              <a:buFont typeface="Meiryo"/>
-              <a:buChar char="▪"/>
-            </a:pPr>
-            <a:r>
-              <a:rPr sz="1100" b="0">
-                <a:solidFill>
-                  <a:srgbClr val="14223A"/>
-                </a:solidFill>
-                <a:latin typeface="Meiryo"/>
-                <a:cs typeface="Meiryo"/>
-                <a:ea typeface="Meiryo"/>
-              </a:rPr>
-              <a:t>AIが作った文面の記録を、どれくらいの期間残すかが未決</a:t>
+              <a:t>AIが作った文面の記録を、どれくらいの期間残すかが未決(いまは1年で消す設定)</a:t>
             </a:r>
           </a:p>
         </p:txBody>
@@ -49844,7 +49792,7 @@
         </p:nvSpPr>
         <p:spPr>
           <a:xfrm>
-            <a:off x="457200" y="3208782"/>
+            <a:off x="457200" y="3006217"/>
             <a:ext cx="11277295" cy="274320"/>
           </a:xfrm>
           <a:prstGeom prst="rect">
@@ -49886,7 +49834,7 @@
         </p:nvSpPr>
         <p:spPr>
           <a:xfrm>
-            <a:off x="457200" y="3537966"/>
+            <a:off x="457200" y="3335401"/>
             <a:ext cx="5547207" cy="614680"/>
           </a:xfrm>
           <a:prstGeom prst="roundRect">
@@ -49932,7 +49880,7 @@
         </p:nvSpPr>
         <p:spPr>
           <a:xfrm>
-            <a:off x="548640" y="3611118"/>
+            <a:off x="548640" y="3408553"/>
             <a:ext cx="274320" cy="274320"/>
           </a:xfrm>
           <a:prstGeom prst="roundRect">
@@ -49994,7 +49942,7 @@
         </p:nvSpPr>
         <p:spPr>
           <a:xfrm>
-            <a:off x="914400" y="3629406"/>
+            <a:off x="914400" y="3426841"/>
             <a:ext cx="4980279" cy="468376"/>
           </a:xfrm>
           <a:prstGeom prst="rect">
@@ -50036,7 +49984,7 @@
         </p:nvSpPr>
         <p:spPr>
           <a:xfrm>
-            <a:off x="6187287" y="3537966"/>
+            <a:off x="6187287" y="3335401"/>
             <a:ext cx="5547207" cy="614680"/>
           </a:xfrm>
           <a:prstGeom prst="roundRect">
@@ -50082,7 +50030,7 @@
         </p:nvSpPr>
         <p:spPr>
           <a:xfrm>
-            <a:off x="6278727" y="3611118"/>
+            <a:off x="6278727" y="3408553"/>
             <a:ext cx="274320" cy="274320"/>
           </a:xfrm>
           <a:prstGeom prst="roundRect">
@@ -50144,7 +50092,7 @@
         </p:nvSpPr>
         <p:spPr>
           <a:xfrm>
-            <a:off x="6644487" y="3629406"/>
+            <a:off x="6644487" y="3426841"/>
             <a:ext cx="4980279" cy="468376"/>
           </a:xfrm>
           <a:prstGeom prst="rect">
@@ -50186,7 +50134,7 @@
         </p:nvSpPr>
         <p:spPr>
           <a:xfrm>
-            <a:off x="457200" y="4262374"/>
+            <a:off x="457200" y="4059809"/>
             <a:ext cx="5547207" cy="614680"/>
           </a:xfrm>
           <a:prstGeom prst="roundRect">
@@ -50232,7 +50180,7 @@
         </p:nvSpPr>
         <p:spPr>
           <a:xfrm>
-            <a:off x="548640" y="4335526"/>
+            <a:off x="548640" y="4132961"/>
             <a:ext cx="274320" cy="274320"/>
           </a:xfrm>
           <a:prstGeom prst="roundRect">
@@ -50294,7 +50242,7 @@
         </p:nvSpPr>
         <p:spPr>
           <a:xfrm>
-            <a:off x="914400" y="4353814"/>
+            <a:off x="914400" y="4151248"/>
             <a:ext cx="4980279" cy="468376"/>
           </a:xfrm>
           <a:prstGeom prst="rect">
@@ -50336,7 +50284,7 @@
         </p:nvSpPr>
         <p:spPr>
           <a:xfrm>
-            <a:off x="6187287" y="4262374"/>
+            <a:off x="6187287" y="4059809"/>
             <a:ext cx="5547207" cy="614680"/>
           </a:xfrm>
           <a:prstGeom prst="roundRect">
@@ -50382,7 +50330,7 @@
         </p:nvSpPr>
         <p:spPr>
           <a:xfrm>
-            <a:off x="6278727" y="4335526"/>
+            <a:off x="6278727" y="4132961"/>
             <a:ext cx="274320" cy="274320"/>
           </a:xfrm>
           <a:prstGeom prst="roundRect">
@@ -50444,7 +50392,7 @@
         </p:nvSpPr>
         <p:spPr>
           <a:xfrm>
-            <a:off x="6644487" y="4353814"/>
+            <a:off x="6644487" y="4151248"/>
             <a:ext cx="4980279" cy="468376"/>
           </a:xfrm>
           <a:prstGeom prst="rect">
@@ -50486,7 +50434,7 @@
         </p:nvSpPr>
         <p:spPr>
           <a:xfrm>
-            <a:off x="457200" y="4986782"/>
+            <a:off x="457200" y="4784217"/>
             <a:ext cx="5547207" cy="407924"/>
           </a:xfrm>
           <a:prstGeom prst="roundRect">
@@ -50532,7 +50480,7 @@
         </p:nvSpPr>
         <p:spPr>
           <a:xfrm>
-            <a:off x="548640" y="5059934"/>
+            <a:off x="548640" y="4857369"/>
             <a:ext cx="274320" cy="274320"/>
           </a:xfrm>
           <a:prstGeom prst="roundRect">
@@ -50594,7 +50542,7 @@
         </p:nvSpPr>
         <p:spPr>
           <a:xfrm>
-            <a:off x="914400" y="5078222"/>
+            <a:off x="914400" y="4875657"/>
             <a:ext cx="4980279" cy="261619"/>
           </a:xfrm>
           <a:prstGeom prst="rect">
@@ -50636,7 +50584,7 @@
         </p:nvSpPr>
         <p:spPr>
           <a:xfrm>
-            <a:off x="6187287" y="4986782"/>
+            <a:off x="6187287" y="4784217"/>
             <a:ext cx="5547207" cy="614680"/>
           </a:xfrm>
           <a:prstGeom prst="roundRect">
@@ -50682,7 +50630,7 @@
         </p:nvSpPr>
         <p:spPr>
           <a:xfrm>
-            <a:off x="6278727" y="5059934"/>
+            <a:off x="6278727" y="4857369"/>
             <a:ext cx="274320" cy="274320"/>
           </a:xfrm>
           <a:prstGeom prst="roundRect">
@@ -50744,7 +50692,7 @@
         </p:nvSpPr>
         <p:spPr>
           <a:xfrm>
-            <a:off x="6644487" y="5078222"/>
+            <a:off x="6644487" y="4875657"/>
             <a:ext cx="4980279" cy="468376"/>
           </a:xfrm>
           <a:prstGeom prst="rect">

--- a/doc/slides/db-for-business.pptx
+++ b/doc/slides/db-for-business.pptx
@@ -49779,7 +49779,7 @@
                 <a:cs typeface="Meiryo"/>
                 <a:ea typeface="Meiryo"/>
               </a:rPr>
-              <a:t>AIが作った文面の記録を、どれくらいの期間残すかが未決(いまは1年で消す設定)</a:t>
+              <a:t>日報に使われなかったAI生成の記録は1年で削除し、日報から参照される記録は保持する(保持期間の日数は未決)</a:t>
             </a:r>
           </a:p>
         </p:txBody>

--- a/doc/slides/db-for-business.pptx
+++ b/doc/slides/db-for-business.pptx
@@ -6015,7 +6015,7 @@
                 <a:cs typeface="Meiryo"/>
                 <a:ea typeface="Meiryo"/>
               </a:rPr>
-              <a:t>顧客・日報・事故報告・領収書・勤怠・クーポン・AIの文面</a:t>
+              <a:t>顧客・日報・事故報告・領収書・勤怠・クーポン・AIの文面・AIの調整材料(年齢帯・教育の言葉・関心度と負担の基準・ご家庭の設定)</a:t>
             </a:r>
           </a:p>
           <a:p>
@@ -6052,7 +6052,7 @@
                 <a:cs typeface="Meiryo"/>
                 <a:ea typeface="Meiryo"/>
               </a:rPr>
-              <a:t>カルテ・予約・請求・入金・相性・移動手当・日報AIの調整材料</a:t>
+              <a:t>カルテ・予約・請求・入金・相性・移動手当</a:t>
             </a:r>
           </a:p>
           <a:p>
@@ -48141,7 +48141,7 @@
                 <a:cs typeface="Meiryo"/>
                 <a:ea typeface="Meiryo"/>
               </a:rPr>
-              <a:t>文面の種類(日報生成・日報の文体ルール[未接続]・事故報告生成・領収書の読み取り・日報メモ欄の入力例・事故報告メモ欄の入力例・事故報告の記載要領・ヒヤリハットの記載要領) / 版番号 / 本文 / 変更メモ / 編集した人 / 保存日時</a:t>
+              <a:t>文面の種類(日報生成・日報の文体ルール・事故報告生成・領収書の読み取り・日報メモ欄の入力例・事故報告メモ欄の入力例・事故報告の記載要領・ヒヤリハットの記載要領) / 版番号 / 本文 / 変更メモ / 編集した人 / 保存日時</a:t>
             </a:r>
           </a:p>
         </p:txBody>
@@ -49375,7 +49375,7 @@
         <p:spPr>
           <a:xfrm>
             <a:off x="457200" y="1115568"/>
-            <a:ext cx="5547207" cy="1910334"/>
+            <a:ext cx="5547207" cy="1707769"/>
           </a:xfrm>
           <a:prstGeom prst="roundRect">
             <a:avLst>
@@ -49423,7 +49423,7 @@
         <p:spPr>
           <a:xfrm>
             <a:off x="457200" y="1115568"/>
-            <a:ext cx="68580" cy="1910334"/>
+            <a:ext cx="68580" cy="1707769"/>
           </a:xfrm>
           <a:prstGeom prst="rect">
             <a:avLst/>
@@ -49509,7 +49509,7 @@
         <p:spPr>
           <a:xfrm>
             <a:off x="667512" y="1527048"/>
-            <a:ext cx="5172303" cy="1407414"/>
+            <a:ext cx="5172303" cy="1204849"/>
           </a:xfrm>
           <a:prstGeom prst="rect">
             <a:avLst/>
@@ -49610,7 +49610,7 @@
         <p:spPr>
           <a:xfrm>
             <a:off x="6187287" y="1115568"/>
-            <a:ext cx="5547207" cy="1910334"/>
+            <a:ext cx="5547207" cy="1707769"/>
           </a:xfrm>
           <a:prstGeom prst="roundRect">
             <a:avLst>
@@ -49658,7 +49658,7 @@
         <p:spPr>
           <a:xfrm>
             <a:off x="6187287" y="1115568"/>
-            <a:ext cx="68580" cy="1910334"/>
+            <a:ext cx="68580" cy="1707769"/>
           </a:xfrm>
           <a:prstGeom prst="rect">
             <a:avLst/>
@@ -49744,7 +49744,7 @@
         <p:spPr>
           <a:xfrm>
             <a:off x="6397599" y="1527048"/>
-            <a:ext cx="5172303" cy="1407414"/>
+            <a:ext cx="5172303" cy="1204849"/>
           </a:xfrm>
           <a:prstGeom prst="rect">
             <a:avLst/>
@@ -49779,59 +49779,7 @@
                 <a:cs typeface="Meiryo"/>
                 <a:ea typeface="Meiryo"/>
               </a:rPr>
-              <a:t>保護者の負担が大きいご家庭で教育的な言葉をねぎらいに切り替える仕組みは予定/準備済み。表と判定の仕組みはあるが、日報作成(AIへの指示文の組み立て)への接続はこれから</a:t>
-            </a:r>
-          </a:p>
-          <a:p>
-            <a:pPr marL="182880" indent="-182880">
-              <a:lnSpc>
-                <a:spcPct val="145000"/>
-              </a:lnSpc>
-              <a:spcBef>
-                <a:spcPts val="400"/>
-              </a:spcBef>
-              <a:buClr>
-                <a:srgbClr val="0369A1"/>
-              </a:buClr>
-              <a:buFont typeface="Meiryo"/>
-              <a:buChar char="▪"/>
-            </a:pPr>
-            <a:r>
-              <a:rPr sz="1100" b="0">
-                <a:solidFill>
-                  <a:srgbClr val="14223A"/>
-                </a:solidFill>
-                <a:latin typeface="Meiryo"/>
-                <a:cs typeface="Meiryo"/>
-                <a:ea typeface="Meiryo"/>
-              </a:rPr>
-              <a:t>文面を編集する画面はできている。年齢帯・教育の言葉・判定基準を編集する画面はこれから</a:t>
-            </a:r>
-          </a:p>
-          <a:p>
-            <a:pPr marL="182880" indent="-182880">
-              <a:lnSpc>
-                <a:spcPct val="145000"/>
-              </a:lnSpc>
-              <a:spcBef>
-                <a:spcPts val="400"/>
-              </a:spcBef>
-              <a:buClr>
-                <a:srgbClr val="0369A1"/>
-              </a:buClr>
-              <a:buFont typeface="Meiryo"/>
-              <a:buChar char="▪"/>
-            </a:pPr>
-            <a:r>
-              <a:rPr sz="1100" b="0">
-                <a:solidFill>
-                  <a:srgbClr val="14223A"/>
-                </a:solidFill>
-                <a:latin typeface="Meiryo"/>
-                <a:cs typeface="Meiryo"/>
-                <a:ea typeface="Meiryo"/>
-              </a:rPr>
-              <a:t>AIが作った文面の記録を、どれくらいの期間残すかが未決</a:t>
+              <a:t>日報に使われなかったAI生成の記録は1年で削除し、日報から参照される記録は保持する(保持期間の日数は未決)</a:t>
             </a:r>
           </a:p>
         </p:txBody>
@@ -49844,7 +49792,7 @@
         </p:nvSpPr>
         <p:spPr>
           <a:xfrm>
-            <a:off x="457200" y="3208782"/>
+            <a:off x="457200" y="3006217"/>
             <a:ext cx="11277295" cy="274320"/>
           </a:xfrm>
           <a:prstGeom prst="rect">
@@ -49886,7 +49834,7 @@
         </p:nvSpPr>
         <p:spPr>
           <a:xfrm>
-            <a:off x="457200" y="3537966"/>
+            <a:off x="457200" y="3335401"/>
             <a:ext cx="5547207" cy="614680"/>
           </a:xfrm>
           <a:prstGeom prst="roundRect">
@@ -49932,7 +49880,7 @@
         </p:nvSpPr>
         <p:spPr>
           <a:xfrm>
-            <a:off x="548640" y="3611118"/>
+            <a:off x="548640" y="3408553"/>
             <a:ext cx="274320" cy="274320"/>
           </a:xfrm>
           <a:prstGeom prst="roundRect">
@@ -49994,7 +49942,7 @@
         </p:nvSpPr>
         <p:spPr>
           <a:xfrm>
-            <a:off x="914400" y="3629406"/>
+            <a:off x="914400" y="3426841"/>
             <a:ext cx="4980279" cy="468376"/>
           </a:xfrm>
           <a:prstGeom prst="rect">
@@ -50036,7 +49984,7 @@
         </p:nvSpPr>
         <p:spPr>
           <a:xfrm>
-            <a:off x="6187287" y="3537966"/>
+            <a:off x="6187287" y="3335401"/>
             <a:ext cx="5547207" cy="614680"/>
           </a:xfrm>
           <a:prstGeom prst="roundRect">
@@ -50082,7 +50030,7 @@
         </p:nvSpPr>
         <p:spPr>
           <a:xfrm>
-            <a:off x="6278727" y="3611118"/>
+            <a:off x="6278727" y="3408553"/>
             <a:ext cx="274320" cy="274320"/>
           </a:xfrm>
           <a:prstGeom prst="roundRect">
@@ -50144,7 +50092,7 @@
         </p:nvSpPr>
         <p:spPr>
           <a:xfrm>
-            <a:off x="6644487" y="3629406"/>
+            <a:off x="6644487" y="3426841"/>
             <a:ext cx="4980279" cy="468376"/>
           </a:xfrm>
           <a:prstGeom prst="rect">
@@ -50186,7 +50134,7 @@
         </p:nvSpPr>
         <p:spPr>
           <a:xfrm>
-            <a:off x="457200" y="4262374"/>
+            <a:off x="457200" y="4059809"/>
             <a:ext cx="5547207" cy="614680"/>
           </a:xfrm>
           <a:prstGeom prst="roundRect">
@@ -50232,7 +50180,7 @@
         </p:nvSpPr>
         <p:spPr>
           <a:xfrm>
-            <a:off x="548640" y="4335526"/>
+            <a:off x="548640" y="4132961"/>
             <a:ext cx="274320" cy="274320"/>
           </a:xfrm>
           <a:prstGeom prst="roundRect">
@@ -50294,7 +50242,7 @@
         </p:nvSpPr>
         <p:spPr>
           <a:xfrm>
-            <a:off x="914400" y="4353814"/>
+            <a:off x="914400" y="4151248"/>
             <a:ext cx="4980279" cy="468376"/>
           </a:xfrm>
           <a:prstGeom prst="rect">
@@ -50336,7 +50284,7 @@
         </p:nvSpPr>
         <p:spPr>
           <a:xfrm>
-            <a:off x="6187287" y="4262374"/>
+            <a:off x="6187287" y="4059809"/>
             <a:ext cx="5547207" cy="614680"/>
           </a:xfrm>
           <a:prstGeom prst="roundRect">
@@ -50382,7 +50330,7 @@
         </p:nvSpPr>
         <p:spPr>
           <a:xfrm>
-            <a:off x="6278727" y="4335526"/>
+            <a:off x="6278727" y="4132961"/>
             <a:ext cx="274320" cy="274320"/>
           </a:xfrm>
           <a:prstGeom prst="roundRect">
@@ -50444,7 +50392,7 @@
         </p:nvSpPr>
         <p:spPr>
           <a:xfrm>
-            <a:off x="6644487" y="4353814"/>
+            <a:off x="6644487" y="4151248"/>
             <a:ext cx="4980279" cy="468376"/>
           </a:xfrm>
           <a:prstGeom prst="rect">
@@ -50486,7 +50434,7 @@
         </p:nvSpPr>
         <p:spPr>
           <a:xfrm>
-            <a:off x="457200" y="4986782"/>
+            <a:off x="457200" y="4784217"/>
             <a:ext cx="5547207" cy="407924"/>
           </a:xfrm>
           <a:prstGeom prst="roundRect">
@@ -50532,7 +50480,7 @@
         </p:nvSpPr>
         <p:spPr>
           <a:xfrm>
-            <a:off x="548640" y="5059934"/>
+            <a:off x="548640" y="4857369"/>
             <a:ext cx="274320" cy="274320"/>
           </a:xfrm>
           <a:prstGeom prst="roundRect">
@@ -50594,7 +50542,7 @@
         </p:nvSpPr>
         <p:spPr>
           <a:xfrm>
-            <a:off x="914400" y="5078222"/>
+            <a:off x="914400" y="4875657"/>
             <a:ext cx="4980279" cy="261619"/>
           </a:xfrm>
           <a:prstGeom prst="rect">
@@ -50636,7 +50584,7 @@
         </p:nvSpPr>
         <p:spPr>
           <a:xfrm>
-            <a:off x="6187287" y="4986782"/>
+            <a:off x="6187287" y="4784217"/>
             <a:ext cx="5547207" cy="614680"/>
           </a:xfrm>
           <a:prstGeom prst="roundRect">
@@ -50682,7 +50630,7 @@
         </p:nvSpPr>
         <p:spPr>
           <a:xfrm>
-            <a:off x="6278727" y="5059934"/>
+            <a:off x="6278727" y="4857369"/>
             <a:ext cx="274320" cy="274320"/>
           </a:xfrm>
           <a:prstGeom prst="roundRect">
@@ -50744,7 +50692,7 @@
         </p:nvSpPr>
         <p:spPr>
           <a:xfrm>
-            <a:off x="6644487" y="5078222"/>
+            <a:off x="6644487" y="4875657"/>
             <a:ext cx="4980279" cy="468376"/>
           </a:xfrm>
           <a:prstGeom prst="rect">
@@ -54154,7 +54102,7 @@
         </p:nvGraphicFramePr>
         <p:xfrm>
           <a:off x="457200" y="1115568"/>
-          <a:ext cx="11277294" cy="4334256"/>
+          <a:ext cx="11277294" cy="4023360"/>
         </p:xfrm>
         <a:graphic>
           <a:graphicData uri="http://schemas.openxmlformats.org/drawingml/2006/table">
@@ -55322,7 +55270,7 @@
                           <a:cs typeface="Meiryo"/>
                           <a:ea typeface="Meiryo"/>
                         </a:rPr>
-                        <a:t>教育への関心度(5段階)を誰がいつ付けるか / 負担の大きさ(5段階)の判定基準</a:t>
+                        <a:t>教育への関心度★・負担の大きさ(PSI)の判定基準の中身(貴社の言葉で)</a:t>
                       </a:r>
                     </a:p>
                   </a:txBody>
@@ -55352,7 +55300,7 @@
                           <a:cs typeface="Meiryo"/>
                           <a:ea typeface="Meiryo"/>
                         </a:rPr>
-                        <a:t>日報の文面を組み替える材料が揃わない</a:t>
+                        <a:t>日報の文面を組み替える材料(キーワード表・言い回し)が空のまま</a:t>
                       </a:r>
                     </a:p>
                   </a:txBody>
@@ -55363,98 +55311,6 @@
                   </a:tcPr>
                 </a:tc>
               </a:tr>
-              <a:tr h="310896">
-                <a:tc>
-                  <a:txBody>
-                    <a:bodyPr wrap="square"/>
-                    <a:lstStyle/>
-                    <a:p>
-                      <a:pPr algn="l">
-                        <a:lnSpc>
-                          <a:spcPct val="115000"/>
-                        </a:lnSpc>
-                        <a:buNone/>
-                      </a:pPr>
-                      <a:r>
-                        <a:rPr sz="1100" b="1">
-                          <a:solidFill>
-                            <a:srgbClr val="14223A"/>
-                          </a:solidFill>
-                          <a:latin typeface="Meiryo"/>
-                          <a:cs typeface="Meiryo"/>
-                          <a:ea typeface="Meiryo"/>
-                        </a:rPr>
-                        <a:t>第15章</a:t>
-                      </a:r>
-                    </a:p>
-                  </a:txBody>
-                  <a:tcPr marL="64008" marR="64008" marT="27432" marB="27432" anchor="ctr">
-                    <a:solidFill>
-                      <a:srgbClr val="FFFFFF"/>
-                    </a:solidFill>
-                  </a:tcPr>
-                </a:tc>
-                <a:tc>
-                  <a:txBody>
-                    <a:bodyPr wrap="square"/>
-                    <a:lstStyle/>
-                    <a:p>
-                      <a:pPr algn="l">
-                        <a:lnSpc>
-                          <a:spcPct val="115000"/>
-                        </a:lnSpc>
-                        <a:buNone/>
-                      </a:pPr>
-                      <a:r>
-                        <a:rPr sz="1100" b="0">
-                          <a:solidFill>
-                            <a:srgbClr val="14223A"/>
-                          </a:solidFill>
-                          <a:latin typeface="Meiryo"/>
-                          <a:cs typeface="Meiryo"/>
-                          <a:ea typeface="Meiryo"/>
-                        </a:rPr>
-                        <a:t>AIが作った文面の記録(入力メモと出力)の保持期間</a:t>
-                      </a:r>
-                    </a:p>
-                  </a:txBody>
-                  <a:tcPr marL="64008" marR="64008" marT="27432" marB="27432" anchor="ctr">
-                    <a:solidFill>
-                      <a:srgbClr val="FFFFFF"/>
-                    </a:solidFill>
-                  </a:tcPr>
-                </a:tc>
-                <a:tc>
-                  <a:txBody>
-                    <a:bodyPr wrap="square"/>
-                    <a:lstStyle/>
-                    <a:p>
-                      <a:pPr algn="l">
-                        <a:lnSpc>
-                          <a:spcPct val="115000"/>
-                        </a:lnSpc>
-                        <a:buNone/>
-                      </a:pPr>
-                      <a:r>
-                        <a:rPr sz="1100" b="0">
-                          <a:solidFill>
-                            <a:srgbClr val="14223A"/>
-                          </a:solidFill>
-                          <a:latin typeface="Meiryo"/>
-                          <a:cs typeface="Meiryo"/>
-                          <a:ea typeface="Meiryo"/>
-                        </a:rPr>
-                        <a:t>記録が際限なく溜まる</a:t>
-                      </a:r>
-                    </a:p>
-                  </a:txBody>
-                  <a:tcPr marL="64008" marR="64008" marT="27432" marB="27432" anchor="ctr">
-                    <a:solidFill>
-                      <a:srgbClr val="FFFFFF"/>
-                    </a:solidFill>
-                  </a:tcPr>
-                </a:tc>
-              </a:tr>
             </a:tbl>
           </a:graphicData>
         </a:graphic>
@@ -55586,7 +55442,7 @@
                 <a:cs typeface="Meiryo"/>
                 <a:ea typeface="Meiryo"/>
               </a:rPr>
-              <a:t>上の13件は、いずれも「業務の決めごと」であって、システムの都合ではありません。決まり次第、そのとおりに作ります。現時点で決まっているものがあれば教えてください。</a:t>
+              <a:t>上の12件は、いずれも「業務の決めごと」であって、システムの都合ではありません。決まり次第、そのとおりに作ります。現時点で決まっているものがあれば教えてください。</a:t>
             </a:r>
           </a:p>
         </p:txBody>
@@ -57790,6 +57646,32 @@
               <a:t>AIに渡す文面の編集(版の履歴・既定に戻す)</a:t>
             </a:r>
           </a:p>
+          <a:p>
+            <a:pPr marL="182880" indent="-182880">
+              <a:lnSpc>
+                <a:spcPct val="132000"/>
+              </a:lnSpc>
+              <a:spcBef>
+                <a:spcPts val="400"/>
+              </a:spcBef>
+              <a:buClr>
+                <a:srgbClr val="0369A1"/>
+              </a:buClr>
+              <a:buFont typeface="Meiryo"/>
+              <a:buChar char="▪"/>
+            </a:pPr>
+            <a:r>
+              <a:rPr sz="1100" b="0">
+                <a:solidFill>
+                  <a:srgbClr val="14223A"/>
+                </a:solidFill>
+                <a:latin typeface="Meiryo"/>
+                <a:cs typeface="Meiryo"/>
+                <a:ea typeface="Meiryo"/>
+              </a:rPr>
+              <a:t>日報AIの年齢帯・教育の言葉・判定基準・ご家庭の設定・生成の記録</a:t>
+            </a:r>
+          </a:p>
         </p:txBody>
       </p:sp>
       <p:sp>
@@ -58075,32 +57957,6 @@
                 <a:ea typeface="Meiryo"/>
               </a:rPr>
               <a:t>移動手当の単価マスタ・移動区間</a:t>
-            </a:r>
-          </a:p>
-          <a:p>
-            <a:pPr marL="182880" indent="-182880">
-              <a:lnSpc>
-                <a:spcPct val="132000"/>
-              </a:lnSpc>
-              <a:spcBef>
-                <a:spcPts val="400"/>
-              </a:spcBef>
-              <a:buClr>
-                <a:srgbClr val="0369A1"/>
-              </a:buClr>
-              <a:buFont typeface="Meiryo"/>
-              <a:buChar char="▪"/>
-            </a:pPr>
-            <a:r>
-              <a:rPr sz="1100" b="0">
-                <a:solidFill>
-                  <a:srgbClr val="14223A"/>
-                </a:solidFill>
-                <a:latin typeface="Meiryo"/>
-                <a:cs typeface="Meiryo"/>
-                <a:ea typeface="Meiryo"/>
-              </a:rPr>
-              <a:t>日報AIの年齢帯・教育の言葉・判定基準・生成の記録</a:t>
             </a:r>
           </a:p>
         </p:txBody>

--- a/doc/slides/db-for-business.pptx
+++ b/doc/slides/db-for-business.pptx
@@ -3534,7 +3534,7 @@
                 <a:cs typeface="Meiryo"/>
                 <a:ea typeface="Meiryo"/>
               </a:rPr>
-              <a:t>業務の流れと、記録が生まれる場所</a:t>
+              <a:t>業務の流れと、記録が残る場所</a:t>
             </a:r>
             <a:r>
               <a:rPr sz="1250" b="0" i="0">
@@ -5141,7 +5141,7 @@
         <p:spPr>
           <a:xfrm>
             <a:off x="457200" y="2852928"/>
-            <a:ext cx="11277295" cy="661670"/>
+            <a:ext cx="11277295" cy="454279"/>
           </a:xfrm>
           <a:prstGeom prst="roundRect">
             <a:avLst>
@@ -5187,7 +5187,7 @@
         <p:spPr>
           <a:xfrm>
             <a:off x="457200" y="2852928"/>
-            <a:ext cx="68580" cy="661670"/>
+            <a:ext cx="68580" cy="454279"/>
           </a:xfrm>
           <a:prstGeom prst="rect">
             <a:avLst/>
@@ -5231,7 +5231,7 @@
         <p:spPr>
           <a:xfrm>
             <a:off x="658368" y="2971800"/>
-            <a:ext cx="10874959" cy="451357"/>
+            <a:ext cx="10874959" cy="243966"/>
           </a:xfrm>
           <a:prstGeom prst="rect">
             <a:avLst/>
@@ -5259,7 +5259,7 @@
                 <a:cs typeface="Meiryo"/>
                 <a:ea typeface="Meiryo"/>
               </a:rPr>
-              <a:t>上の6つが業務の流れです。それぞれの段階で、その下に書いたシートに記録が生まれます。第3章以降は、この順番に沿って1つずつご確認いただきます。</a:t>
+              <a:t>上の6つが業務の流れです。それぞれの段階で、その下に書いたシートに記録が残ります。第3章以降は、この順番に沿って1つずつご確認いただきます。</a:t>
             </a:r>
           </a:p>
         </p:txBody>
@@ -5490,7 +5490,7 @@
                 <a:cs typeface="Meiryo"/>
                 <a:ea typeface="Meiryo"/>
               </a:rPr>
-              <a:t>(第12章) — 割当を機械に手伝わせるための材料</a:t>
+              <a:t>(第12章) — 割当を自動で組むための材料</a:t>
             </a:r>
           </a:p>
           <a:p>
@@ -6078,7 +6078,7 @@
                 <a:cs typeface="Meiryo"/>
                 <a:ea typeface="Meiryo"/>
               </a:rPr>
-              <a:t>「入れ物だけ」は、記録する場所は決めたが画面がまだ無い状態です。だからこそ、いまなら項目を変えやすい段階でもあります。</a:t>
+              <a:t>「入れ物だけ」は、記録する場所は決めたが画面がまだ無い状態です。いまなら項目を変えやすい段階です。</a:t>
             </a:r>
           </a:p>
         </p:txBody>
@@ -14273,7 +14273,7 @@
                 <a:cs typeface="Meiryo"/>
                 <a:ea typeface="Meiryo"/>
               </a:rPr>
-              <a:t>スタッフは「業務上の人」であると同時に「システムにログインする人」です。1人1行で、認証まわりの情報も同じ行に持ちます。</a:t>
+              <a:t>スタッフは業務上の担当者であり、システムにログインする人でもあります。1人1行で、認証まわりの情報も同じ行に持ちます。</a:t>
             </a:r>
           </a:p>
         </p:txBody>
@@ -16505,7 +16505,7 @@
         <p:spPr>
           <a:xfrm>
             <a:off x="475488" y="1115568"/>
-            <a:ext cx="10820095" cy="712470"/>
+            <a:ext cx="10820095" cy="493395"/>
           </a:xfrm>
           <a:prstGeom prst="rect">
             <a:avLst/>
@@ -16533,7 +16533,7 @@
                 <a:cs typeface="Meiryo"/>
                 <a:ea typeface="Meiryo"/>
               </a:rPr>
-              <a:t>鍵の場所・駐車の仕方・アレルギー・前回からの引き継ぎなど、「そのお宅に行く人が事前に知っておくべきこと」を1件1行で積み上げます。写真も添付できます。</a:t>
+              <a:t>鍵の場所・駐車の仕方・アレルギー・前回からの引き継ぎなど、訪問する人が事前に知っておくべきことを1件1行で記録します。写真も添付できます。</a:t>
             </a:r>
           </a:p>
         </p:txBody>
@@ -16546,7 +16546,7 @@
         </p:nvSpPr>
         <p:spPr>
           <a:xfrm>
-            <a:off x="457200" y="1937766"/>
+            <a:off x="457200" y="1718690"/>
             <a:ext cx="11277295" cy="931164"/>
           </a:xfrm>
           <a:prstGeom prst="roundRect">
@@ -16594,7 +16594,7 @@
         </p:nvSpPr>
         <p:spPr>
           <a:xfrm>
-            <a:off x="457200" y="1937766"/>
+            <a:off x="457200" y="1718690"/>
             <a:ext cx="68580" cy="931164"/>
           </a:xfrm>
           <a:prstGeom prst="rect">
@@ -16638,7 +16638,7 @@
         </p:nvSpPr>
         <p:spPr>
           <a:xfrm>
-            <a:off x="658368" y="2010918"/>
+            <a:off x="658368" y="1791843"/>
             <a:ext cx="6705295" cy="256032"/>
           </a:xfrm>
           <a:prstGeom prst="rect">
@@ -16691,7 +16691,7 @@
         </p:nvSpPr>
         <p:spPr>
           <a:xfrm>
-            <a:off x="10499483" y="2010918"/>
+            <a:off x="10499483" y="1791843"/>
             <a:ext cx="1088707" cy="237744"/>
           </a:xfrm>
           <a:prstGeom prst="roundRect">
@@ -16753,7 +16753,7 @@
         </p:nvSpPr>
         <p:spPr>
           <a:xfrm>
-            <a:off x="658368" y="2285238"/>
+            <a:off x="658368" y="2066162"/>
             <a:ext cx="10874959" cy="510540"/>
           </a:xfrm>
           <a:prstGeom prst="rect">
@@ -16795,7 +16795,7 @@
         </p:nvSpPr>
         <p:spPr>
           <a:xfrm>
-            <a:off x="457200" y="2996946"/>
+            <a:off x="457200" y="2777870"/>
             <a:ext cx="11277295" cy="721614"/>
           </a:xfrm>
           <a:prstGeom prst="roundRect">
@@ -16843,7 +16843,7 @@
         </p:nvSpPr>
         <p:spPr>
           <a:xfrm>
-            <a:off x="457200" y="2996946"/>
+            <a:off x="457200" y="2777870"/>
             <a:ext cx="68580" cy="721614"/>
           </a:xfrm>
           <a:prstGeom prst="rect">
@@ -16887,7 +16887,7 @@
         </p:nvSpPr>
         <p:spPr>
           <a:xfrm>
-            <a:off x="658368" y="3070098"/>
+            <a:off x="658368" y="2851023"/>
             <a:ext cx="6705295" cy="256032"/>
           </a:xfrm>
           <a:prstGeom prst="rect">
@@ -16940,7 +16940,7 @@
         </p:nvSpPr>
         <p:spPr>
           <a:xfrm>
-            <a:off x="10499483" y="3070098"/>
+            <a:off x="10499483" y="2851023"/>
             <a:ext cx="1088707" cy="237744"/>
           </a:xfrm>
           <a:prstGeom prst="roundRect">
@@ -17002,7 +17002,7 @@
         </p:nvSpPr>
         <p:spPr>
           <a:xfrm>
-            <a:off x="658368" y="3344418"/>
+            <a:off x="658368" y="3125342"/>
             <a:ext cx="10874959" cy="300990"/>
           </a:xfrm>
           <a:prstGeom prst="rect">
@@ -20386,7 +20386,7 @@
                 <a:cs typeface="Meiryo"/>
                 <a:ea typeface="Meiryo"/>
               </a:rPr>
-              <a:t>   「これから行く約束」— 実際に行った記録(日報)とは別に持つ</a:t>
+              <a:t>   これから行く約束の記録。実際に行った記録(日報)とは別に持つ</a:t>
             </a:r>
           </a:p>
         </p:txBody>
@@ -20548,7 +20548,7 @@
                 <a:cs typeface="Meiryo"/>
                 <a:ea typeface="Meiryo"/>
               </a:rPr>
-              <a:t>予約は約束、日報は実績です。片方しか無い状態(予約なしの緊急訪問、キャンセルで日報が無い予約)が普通に起きるため、あえて分けています。</a:t>
+              <a:t>予約は約束、日報は実績です。片方しか無い状態(予約なしの緊急訪問、キャンセルで日報が無い予約)が普通に起きるため、シートを分けています。</a:t>
             </a:r>
           </a:p>
         </p:txBody>
@@ -22029,7 +22029,7 @@
                 <a:cs typeface="Meiryo"/>
                 <a:ea typeface="Meiryo"/>
               </a:rPr>
-              <a:t>受付枠は「毎週火曜9-17時は可」に「今週の火曜だけ不可」を重ねられる。重なったら「不可」が勝つ</a:t>
+              <a:t>受付枠は「毎週火曜9-17時は可」に「今週の火曜だけ不可」を重ねられる。重なったら「不可」を優先する</a:t>
             </a:r>
           </a:p>
           <a:p>
@@ -23472,7 +23472,7 @@
                 <a:cs typeface="Meiryo"/>
                 <a:ea typeface="Meiryo"/>
               </a:rPr>
-              <a:t>同じスタッフの時間重複は、システムで絶対に止めるべきですか。警告だけ出して現場判断に任せてよいですか</a:t>
+              <a:t>同じスタッフの時間重複は、システムで止めるべきですか。警告だけ出して現場判断に任せてよいですか</a:t>
             </a:r>
           </a:p>
         </p:txBody>
@@ -24635,7 +24635,7 @@
         <p:spPr>
           <a:xfrm>
             <a:off x="457200" y="1115568"/>
-            <a:ext cx="5547207" cy="1707769"/>
+            <a:ext cx="5547207" cy="1505204"/>
           </a:xfrm>
           <a:prstGeom prst="roundRect">
             <a:avLst>
@@ -24683,7 +24683,7 @@
         <p:spPr>
           <a:xfrm>
             <a:off x="457200" y="1115568"/>
-            <a:ext cx="68580" cy="1707769"/>
+            <a:ext cx="68580" cy="1505204"/>
           </a:xfrm>
           <a:prstGeom prst="rect">
             <a:avLst/>
@@ -24769,7 +24769,7 @@
         <p:spPr>
           <a:xfrm>
             <a:off x="667512" y="1527048"/>
-            <a:ext cx="5172303" cy="1204849"/>
+            <a:ext cx="5172303" cy="1002284"/>
           </a:xfrm>
           <a:prstGeom prst="rect">
             <a:avLst/>
@@ -24804,7 +24804,7 @@
                 <a:cs typeface="Meiryo"/>
                 <a:ea typeface="Meiryo"/>
               </a:rPr>
-              <a:t>日報は項目ごとに欄が分かれているため、「この欄だけ集計する」ができる</a:t>
+              <a:t>日報は項目ごとに欄が分かれているため、欄ごとの集計ができる</a:t>
             </a:r>
           </a:p>
           <a:p>
@@ -24870,7 +24870,7 @@
         <p:spPr>
           <a:xfrm>
             <a:off x="6187287" y="1115568"/>
-            <a:ext cx="5547207" cy="1707769"/>
+            <a:ext cx="5547207" cy="1505204"/>
           </a:xfrm>
           <a:prstGeom prst="roundRect">
             <a:avLst>
@@ -24918,7 +24918,7 @@
         <p:spPr>
           <a:xfrm>
             <a:off x="6187287" y="1115568"/>
-            <a:ext cx="68580" cy="1707769"/>
+            <a:ext cx="68580" cy="1505204"/>
           </a:xfrm>
           <a:prstGeom prst="rect">
             <a:avLst/>
@@ -25004,7 +25004,7 @@
         <p:spPr>
           <a:xfrm>
             <a:off x="6397599" y="1527048"/>
-            <a:ext cx="5172303" cy="1204849"/>
+            <a:ext cx="5172303" cy="1002284"/>
           </a:xfrm>
           <a:prstGeom prst="rect">
             <a:avLst/>
@@ -25052,7 +25052,7 @@
         </p:nvSpPr>
         <p:spPr>
           <a:xfrm>
-            <a:off x="457200" y="3006217"/>
+            <a:off x="457200" y="2803652"/>
             <a:ext cx="11277295" cy="274320"/>
           </a:xfrm>
           <a:prstGeom prst="rect">
@@ -25094,7 +25094,7 @@
         </p:nvSpPr>
         <p:spPr>
           <a:xfrm>
-            <a:off x="457200" y="3335401"/>
+            <a:off x="457200" y="3132836"/>
             <a:ext cx="5547207" cy="614680"/>
           </a:xfrm>
           <a:prstGeom prst="roundRect">
@@ -25140,7 +25140,7 @@
         </p:nvSpPr>
         <p:spPr>
           <a:xfrm>
-            <a:off x="548640" y="3408553"/>
+            <a:off x="548640" y="3205988"/>
             <a:ext cx="274320" cy="274320"/>
           </a:xfrm>
           <a:prstGeom prst="roundRect">
@@ -25202,7 +25202,7 @@
         </p:nvSpPr>
         <p:spPr>
           <a:xfrm>
-            <a:off x="914400" y="3426841"/>
+            <a:off x="914400" y="3224276"/>
             <a:ext cx="4980279" cy="468376"/>
           </a:xfrm>
           <a:prstGeom prst="rect">
@@ -25244,7 +25244,7 @@
         </p:nvSpPr>
         <p:spPr>
           <a:xfrm>
-            <a:off x="6187287" y="3335401"/>
+            <a:off x="6187287" y="3132836"/>
             <a:ext cx="5547207" cy="821435"/>
           </a:xfrm>
           <a:prstGeom prst="roundRect">
@@ -25290,7 +25290,7 @@
         </p:nvSpPr>
         <p:spPr>
           <a:xfrm>
-            <a:off x="6278727" y="3408553"/>
+            <a:off x="6278727" y="3205988"/>
             <a:ext cx="274320" cy="274320"/>
           </a:xfrm>
           <a:prstGeom prst="roundRect">
@@ -25352,7 +25352,7 @@
         </p:nvSpPr>
         <p:spPr>
           <a:xfrm>
-            <a:off x="6644487" y="3426841"/>
+            <a:off x="6644487" y="3224276"/>
             <a:ext cx="4980279" cy="675131"/>
           </a:xfrm>
           <a:prstGeom prst="rect">
@@ -25394,7 +25394,7 @@
         </p:nvSpPr>
         <p:spPr>
           <a:xfrm>
-            <a:off x="457200" y="4059809"/>
+            <a:off x="457200" y="3857244"/>
             <a:ext cx="5547207" cy="614680"/>
           </a:xfrm>
           <a:prstGeom prst="roundRect">
@@ -25440,7 +25440,7 @@
         </p:nvSpPr>
         <p:spPr>
           <a:xfrm>
-            <a:off x="548640" y="4132961"/>
+            <a:off x="548640" y="3930396"/>
             <a:ext cx="274320" cy="274320"/>
           </a:xfrm>
           <a:prstGeom prst="roundRect">
@@ -25502,7 +25502,7 @@
         </p:nvSpPr>
         <p:spPr>
           <a:xfrm>
-            <a:off x="914400" y="4151248"/>
+            <a:off x="914400" y="3948684"/>
             <a:ext cx="4980279" cy="468376"/>
           </a:xfrm>
           <a:prstGeom prst="rect">
@@ -25544,7 +25544,7 @@
         </p:nvSpPr>
         <p:spPr>
           <a:xfrm>
-            <a:off x="6187287" y="4266565"/>
+            <a:off x="6187287" y="4064000"/>
             <a:ext cx="5547207" cy="407924"/>
           </a:xfrm>
           <a:prstGeom prst="roundRect">
@@ -25590,7 +25590,7 @@
         </p:nvSpPr>
         <p:spPr>
           <a:xfrm>
-            <a:off x="6278727" y="4339717"/>
+            <a:off x="6278727" y="4137152"/>
             <a:ext cx="274320" cy="274320"/>
           </a:xfrm>
           <a:prstGeom prst="roundRect">
@@ -25652,7 +25652,7 @@
         </p:nvSpPr>
         <p:spPr>
           <a:xfrm>
-            <a:off x="6644487" y="4358004"/>
+            <a:off x="6644487" y="4155440"/>
             <a:ext cx="4980279" cy="261619"/>
           </a:xfrm>
           <a:prstGeom prst="rect">
@@ -25694,7 +25694,7 @@
         </p:nvSpPr>
         <p:spPr>
           <a:xfrm>
-            <a:off x="6187287" y="4784216"/>
+            <a:off x="6187287" y="4581652"/>
             <a:ext cx="5547207" cy="407924"/>
           </a:xfrm>
           <a:prstGeom prst="roundRect">
@@ -25740,7 +25740,7 @@
         </p:nvSpPr>
         <p:spPr>
           <a:xfrm>
-            <a:off x="6278727" y="4857369"/>
+            <a:off x="6278727" y="4654804"/>
             <a:ext cx="274320" cy="274320"/>
           </a:xfrm>
           <a:prstGeom prst="roundRect">
@@ -25802,7 +25802,7 @@
         </p:nvSpPr>
         <p:spPr>
           <a:xfrm>
-            <a:off x="6644487" y="4875656"/>
+            <a:off x="6644487" y="4673092"/>
             <a:ext cx="4980279" cy="261619"/>
           </a:xfrm>
           <a:prstGeom prst="rect">
@@ -25844,7 +25844,7 @@
         </p:nvSpPr>
         <p:spPr>
           <a:xfrm>
-            <a:off x="457200" y="4784217"/>
+            <a:off x="457200" y="4581652"/>
             <a:ext cx="5547207" cy="614680"/>
           </a:xfrm>
           <a:prstGeom prst="roundRect">
@@ -25890,7 +25890,7 @@
         </p:nvSpPr>
         <p:spPr>
           <a:xfrm>
-            <a:off x="548640" y="4857369"/>
+            <a:off x="548640" y="4654804"/>
             <a:ext cx="274320" cy="274320"/>
           </a:xfrm>
           <a:prstGeom prst="roundRect">
@@ -25952,7 +25952,7 @@
         </p:nvSpPr>
         <p:spPr>
           <a:xfrm>
-            <a:off x="914400" y="4875657"/>
+            <a:off x="914400" y="4673092"/>
             <a:ext cx="4980279" cy="468376"/>
           </a:xfrm>
           <a:prstGeom prst="rect">
@@ -25994,7 +25994,7 @@
         </p:nvSpPr>
         <p:spPr>
           <a:xfrm>
-            <a:off x="6187287" y="5301868"/>
+            <a:off x="6187287" y="5099304"/>
             <a:ext cx="5547207" cy="614680"/>
           </a:xfrm>
           <a:prstGeom prst="roundRect">
@@ -26040,7 +26040,7 @@
         </p:nvSpPr>
         <p:spPr>
           <a:xfrm>
-            <a:off x="6278727" y="5375020"/>
+            <a:off x="6278727" y="5172456"/>
             <a:ext cx="274320" cy="274320"/>
           </a:xfrm>
           <a:prstGeom prst="roundRect">
@@ -26102,7 +26102,7 @@
         </p:nvSpPr>
         <p:spPr>
           <a:xfrm>
-            <a:off x="6644487" y="5393308"/>
+            <a:off x="6644487" y="5190743"/>
             <a:ext cx="4980279" cy="468376"/>
           </a:xfrm>
           <a:prstGeom prst="rect">
@@ -27064,7 +27064,7 @@
                 <a:cs typeface="Meiryo"/>
                 <a:ea typeface="Meiryo"/>
               </a:rPr>
-              <a:t>請求区分の初期値は「会社経費」。選び忘れても、うっかりお客様に請求してしまう方には転ばない</a:t>
+              <a:t>請求区分の初期値は「会社経費」。選び忘れても、お客様への請求にはならない</a:t>
             </a:r>
           </a:p>
           <a:p>
@@ -29553,7 +29553,7 @@
                 <a:cs typeface="Meiryo"/>
                 <a:ea typeface="Meiryo"/>
               </a:rPr>
-              <a:t>想定していない項目を送ろうとすると、黙って捨てずにエラーにする</a:t>
+              <a:t>想定していない項目を送ると、無視せずエラーにする</a:t>
             </a:r>
           </a:p>
         </p:txBody>
@@ -32311,7 +32311,7 @@
                 <a:cs typeface="Meiryo"/>
                 <a:ea typeface="Meiryo"/>
               </a:rPr>
-              <a:t>システムが勝手に守ってくれる決めごと。入力ミスがあっても、この内容に反する登録はそもそもできないようになっています。</a:t>
+              <a:t>システム側で守られる決めごと。入力ミスがあっても、この内容に反する登録はできないようになっています。</a:t>
             </a:r>
           </a:p>
         </p:txBody>
@@ -33266,7 +33266,7 @@
                 <a:cs typeface="Meiryo"/>
                 <a:ea typeface="Meiryo"/>
               </a:rPr>
-              <a:t>「1人1回」「1人年1回」の上限は、システム側で必ず守られる(画面のチェック漏れでも通らない)</a:t>
+              <a:t>「1人1回」「1人年1回」の上限は、画面を通らない経路でも守られる</a:t>
             </a:r>
           </a:p>
           <a:p>
@@ -33318,7 +33318,7 @@
                 <a:cs typeface="Meiryo"/>
                 <a:ea typeface="Meiryo"/>
               </a:rPr>
-              <a:t>廃止するときは行を消さず「無効」にする(過去の使用記録が宙に浮かない)</a:t>
+              <a:t>廃止するときは行を消さず「無効」にする(過去の使用記録の参照先が残る)</a:t>
             </a:r>
           </a:p>
         </p:txBody>
@@ -38386,7 +38386,7 @@
                 <a:cs typeface="Meiryo"/>
                 <a:ea typeface="Meiryo"/>
               </a:rPr>
-              <a:t>   「誰をどのお宅に行かせるか」を機械に手伝わせるための材料</a:t>
+              <a:t>   誰をどのお宅に行かせるかを決めるための材料</a:t>
             </a:r>
           </a:p>
         </p:txBody>
@@ -38548,7 +38548,7 @@
                 <a:cs typeface="Meiryo"/>
                 <a:ea typeface="Meiryo"/>
               </a:rPr>
-              <a:t>見る項目そのもの(資格・喫煙・ペット・お子様の年齢…)を後から足せるように、「項目のマスタ」と「その値」を分けて持っています。何を見るかはこれから決める段階です。</a:t>
+              <a:t>見る項目そのもの(資格・喫煙・ペット・お子様の年齢…)を後から足せるように、項目のマスタとその値を分けて持っています。何を見るかはこれから決める段階です。</a:t>
             </a:r>
           </a:p>
         </p:txBody>
@@ -41887,7 +41887,7 @@
         <p:spPr>
           <a:xfrm>
             <a:off x="475488" y="1115568"/>
-            <a:ext cx="10820095" cy="712470"/>
+            <a:ext cx="10820095" cy="493395"/>
           </a:xfrm>
           <a:prstGeom prst="rect">
             <a:avLst/>
@@ -41915,7 +41915,7 @@
                 <a:cs typeface="Meiryo"/>
                 <a:ea typeface="Meiryo"/>
               </a:rPr>
-              <a:t>手当の単価を「マスタ」に持ち、実際の移動を「区間」で1本ずつ記録します。自動車だけを前提にしていた現行システムを、他の手段にも広げる形です。</a:t>
+              <a:t>手当の単価をマスタに持ち、実際の移動を区間として1本ずつ記録します。自動車だけを前提にしていた現行システムを、他の手段にも広げる形です。</a:t>
             </a:r>
           </a:p>
         </p:txBody>
@@ -41928,7 +41928,7 @@
         </p:nvSpPr>
         <p:spPr>
           <a:xfrm>
-            <a:off x="457200" y="1937766"/>
+            <a:off x="457200" y="1718690"/>
             <a:ext cx="11277295" cy="931164"/>
           </a:xfrm>
           <a:prstGeom prst="roundRect">
@@ -41976,7 +41976,7 @@
         </p:nvSpPr>
         <p:spPr>
           <a:xfrm>
-            <a:off x="457200" y="1937766"/>
+            <a:off x="457200" y="1718690"/>
             <a:ext cx="68580" cy="931164"/>
           </a:xfrm>
           <a:prstGeom prst="rect">
@@ -42020,7 +42020,7 @@
         </p:nvSpPr>
         <p:spPr>
           <a:xfrm>
-            <a:off x="658368" y="2010918"/>
+            <a:off x="658368" y="1791843"/>
             <a:ext cx="6705295" cy="256032"/>
           </a:xfrm>
           <a:prstGeom prst="rect">
@@ -42073,7 +42073,7 @@
         </p:nvSpPr>
         <p:spPr>
           <a:xfrm>
-            <a:off x="10378833" y="2010918"/>
+            <a:off x="10378833" y="1791843"/>
             <a:ext cx="1209357" cy="237744"/>
           </a:xfrm>
           <a:prstGeom prst="roundRect">
@@ -42135,7 +42135,7 @@
         </p:nvSpPr>
         <p:spPr>
           <a:xfrm>
-            <a:off x="658368" y="2285238"/>
+            <a:off x="658368" y="2066162"/>
             <a:ext cx="10874959" cy="510540"/>
           </a:xfrm>
           <a:prstGeom prst="rect">
@@ -42177,7 +42177,7 @@
         </p:nvSpPr>
         <p:spPr>
           <a:xfrm>
-            <a:off x="457200" y="2996946"/>
+            <a:off x="457200" y="2777870"/>
             <a:ext cx="11277295" cy="931164"/>
           </a:xfrm>
           <a:prstGeom prst="roundRect">
@@ -42225,7 +42225,7 @@
         </p:nvSpPr>
         <p:spPr>
           <a:xfrm>
-            <a:off x="457200" y="2996946"/>
+            <a:off x="457200" y="2777870"/>
             <a:ext cx="68580" cy="931164"/>
           </a:xfrm>
           <a:prstGeom prst="rect">
@@ -42269,7 +42269,7 @@
         </p:nvSpPr>
         <p:spPr>
           <a:xfrm>
-            <a:off x="658368" y="3070098"/>
+            <a:off x="658368" y="2851023"/>
             <a:ext cx="6705295" cy="256032"/>
           </a:xfrm>
           <a:prstGeom prst="rect">
@@ -42322,7 +42322,7 @@
         </p:nvSpPr>
         <p:spPr>
           <a:xfrm>
-            <a:off x="10499483" y="3070098"/>
+            <a:off x="10499483" y="2851023"/>
             <a:ext cx="1088707" cy="237744"/>
           </a:xfrm>
           <a:prstGeom prst="roundRect">
@@ -42384,7 +42384,7 @@
         </p:nvSpPr>
         <p:spPr>
           <a:xfrm>
-            <a:off x="658368" y="3344418"/>
+            <a:off x="658368" y="3125342"/>
             <a:ext cx="10874959" cy="510540"/>
           </a:xfrm>
           <a:prstGeom prst="rect">
@@ -44440,7 +44440,7 @@
                 <a:cs typeface="Meiryo"/>
                 <a:ea typeface="Meiryo"/>
               </a:rPr>
-              <a:t>   業務担当の方が直接触ることはない、動かすための土台</a:t>
+              <a:t>   ログイン・通知・設定など、システムを動かすための部分</a:t>
             </a:r>
           </a:p>
         </p:txBody>
@@ -44574,7 +44574,7 @@
         <p:spPr>
           <a:xfrm>
             <a:off x="475488" y="1115568"/>
-            <a:ext cx="10820095" cy="712470"/>
+            <a:ext cx="10820095" cy="493395"/>
           </a:xfrm>
           <a:prstGeom prst="rect">
             <a:avLst/>
@@ -44602,7 +44602,7 @@
                 <a:cs typeface="Meiryo"/>
                 <a:ea typeface="Meiryo"/>
               </a:rPr>
-              <a:t>直接の業務データではありませんが、「抜けが無いか」の確認対象として一覧に入れます。特に一番下の「法人ごとの設定」は、実務の運用値が入る場所です。</a:t>
+              <a:t>直接の業務データではありませんが、抜けが無いかの確認対象として一覧に入れます。一番下の「法人ごとの設定」は、実務の運用値が入る場所です。</a:t>
             </a:r>
           </a:p>
         </p:txBody>
@@ -44615,7 +44615,7 @@
         </p:nvSpPr>
         <p:spPr>
           <a:xfrm>
-            <a:off x="457200" y="1937766"/>
+            <a:off x="457200" y="1718690"/>
             <a:ext cx="11277295" cy="721614"/>
           </a:xfrm>
           <a:prstGeom prst="roundRect">
@@ -44663,7 +44663,7 @@
         </p:nvSpPr>
         <p:spPr>
           <a:xfrm>
-            <a:off x="457200" y="1937766"/>
+            <a:off x="457200" y="1718690"/>
             <a:ext cx="68580" cy="721614"/>
           </a:xfrm>
           <a:prstGeom prst="rect">
@@ -44707,7 +44707,7 @@
         </p:nvSpPr>
         <p:spPr>
           <a:xfrm>
-            <a:off x="658368" y="2010918"/>
+            <a:off x="658368" y="1791843"/>
             <a:ext cx="6705295" cy="256032"/>
           </a:xfrm>
           <a:prstGeom prst="rect">
@@ -44760,7 +44760,7 @@
         </p:nvSpPr>
         <p:spPr>
           <a:xfrm>
-            <a:off x="10499483" y="2010918"/>
+            <a:off x="10499483" y="1791843"/>
             <a:ext cx="1088707" cy="237744"/>
           </a:xfrm>
           <a:prstGeom prst="roundRect">
@@ -44822,7 +44822,7 @@
         </p:nvSpPr>
         <p:spPr>
           <a:xfrm>
-            <a:off x="658368" y="2285238"/>
+            <a:off x="658368" y="2066162"/>
             <a:ext cx="10874959" cy="300990"/>
           </a:xfrm>
           <a:prstGeom prst="rect">
@@ -44864,7 +44864,7 @@
         </p:nvSpPr>
         <p:spPr>
           <a:xfrm>
-            <a:off x="457200" y="2787396"/>
+            <a:off x="457200" y="2568321"/>
             <a:ext cx="11277295" cy="721614"/>
           </a:xfrm>
           <a:prstGeom prst="roundRect">
@@ -44912,7 +44912,7 @@
         </p:nvSpPr>
         <p:spPr>
           <a:xfrm>
-            <a:off x="457200" y="2787396"/>
+            <a:off x="457200" y="2568321"/>
             <a:ext cx="68580" cy="721614"/>
           </a:xfrm>
           <a:prstGeom prst="rect">
@@ -44956,7 +44956,7 @@
         </p:nvSpPr>
         <p:spPr>
           <a:xfrm>
-            <a:off x="658368" y="2860548"/>
+            <a:off x="658368" y="2641473"/>
             <a:ext cx="6705295" cy="256032"/>
           </a:xfrm>
           <a:prstGeom prst="rect">
@@ -45009,7 +45009,7 @@
         </p:nvSpPr>
         <p:spPr>
           <a:xfrm>
-            <a:off x="10137533" y="2860548"/>
+            <a:off x="10137533" y="2641473"/>
             <a:ext cx="1450657" cy="237744"/>
           </a:xfrm>
           <a:prstGeom prst="roundRect">
@@ -45071,7 +45071,7 @@
         </p:nvSpPr>
         <p:spPr>
           <a:xfrm>
-            <a:off x="658368" y="3134868"/>
+            <a:off x="658368" y="2915793"/>
             <a:ext cx="10874959" cy="300990"/>
           </a:xfrm>
           <a:prstGeom prst="rect">
@@ -45113,7 +45113,7 @@
         </p:nvSpPr>
         <p:spPr>
           <a:xfrm>
-            <a:off x="457200" y="3637026"/>
+            <a:off x="457200" y="3417951"/>
             <a:ext cx="11277295" cy="721614"/>
           </a:xfrm>
           <a:prstGeom prst="roundRect">
@@ -45161,7 +45161,7 @@
         </p:nvSpPr>
         <p:spPr>
           <a:xfrm>
-            <a:off x="457200" y="3637026"/>
+            <a:off x="457200" y="3417951"/>
             <a:ext cx="68580" cy="721614"/>
           </a:xfrm>
           <a:prstGeom prst="rect">
@@ -45205,7 +45205,7 @@
         </p:nvSpPr>
         <p:spPr>
           <a:xfrm>
-            <a:off x="658368" y="3710178"/>
+            <a:off x="658368" y="3491103"/>
             <a:ext cx="6705295" cy="256032"/>
           </a:xfrm>
           <a:prstGeom prst="rect">
@@ -45258,7 +45258,7 @@
         </p:nvSpPr>
         <p:spPr>
           <a:xfrm>
-            <a:off x="10258183" y="3710178"/>
+            <a:off x="10258183" y="3491103"/>
             <a:ext cx="1330007" cy="237744"/>
           </a:xfrm>
           <a:prstGeom prst="roundRect">
@@ -45320,7 +45320,7 @@
         </p:nvSpPr>
         <p:spPr>
           <a:xfrm>
-            <a:off x="658368" y="3984498"/>
+            <a:off x="658368" y="3765423"/>
             <a:ext cx="10874959" cy="300990"/>
           </a:xfrm>
           <a:prstGeom prst="rect">
@@ -45362,7 +45362,7 @@
         </p:nvSpPr>
         <p:spPr>
           <a:xfrm>
-            <a:off x="457200" y="4486656"/>
+            <a:off x="457200" y="4267581"/>
             <a:ext cx="11277295" cy="721614"/>
           </a:xfrm>
           <a:prstGeom prst="roundRect">
@@ -45410,7 +45410,7 @@
         </p:nvSpPr>
         <p:spPr>
           <a:xfrm>
-            <a:off x="457200" y="4486656"/>
+            <a:off x="457200" y="4267581"/>
             <a:ext cx="68580" cy="721614"/>
           </a:xfrm>
           <a:prstGeom prst="rect">
@@ -45454,7 +45454,7 @@
         </p:nvSpPr>
         <p:spPr>
           <a:xfrm>
-            <a:off x="658368" y="4559808"/>
+            <a:off x="658368" y="4340733"/>
             <a:ext cx="6705295" cy="256032"/>
           </a:xfrm>
           <a:prstGeom prst="rect">
@@ -45507,7 +45507,7 @@
         </p:nvSpPr>
         <p:spPr>
           <a:xfrm>
-            <a:off x="10499483" y="4559808"/>
+            <a:off x="10499483" y="4340733"/>
             <a:ext cx="1088707" cy="237744"/>
           </a:xfrm>
           <a:prstGeom prst="roundRect">
@@ -45569,7 +45569,7 @@
         </p:nvSpPr>
         <p:spPr>
           <a:xfrm>
-            <a:off x="658368" y="4834128"/>
+            <a:off x="658368" y="4615053"/>
             <a:ext cx="10874959" cy="300990"/>
           </a:xfrm>
           <a:prstGeom prst="rect">
@@ -45611,7 +45611,7 @@
         </p:nvSpPr>
         <p:spPr>
           <a:xfrm>
-            <a:off x="457200" y="5336286"/>
+            <a:off x="457200" y="5117211"/>
             <a:ext cx="11277295" cy="721614"/>
           </a:xfrm>
           <a:prstGeom prst="roundRect">
@@ -45659,7 +45659,7 @@
         </p:nvSpPr>
         <p:spPr>
           <a:xfrm>
-            <a:off x="457200" y="5336286"/>
+            <a:off x="457200" y="5117211"/>
             <a:ext cx="68580" cy="721614"/>
           </a:xfrm>
           <a:prstGeom prst="rect">
@@ -45703,7 +45703,7 @@
         </p:nvSpPr>
         <p:spPr>
           <a:xfrm>
-            <a:off x="658368" y="5409438"/>
+            <a:off x="658368" y="5190363"/>
             <a:ext cx="6705295" cy="256032"/>
           </a:xfrm>
           <a:prstGeom prst="rect">
@@ -45756,7 +45756,7 @@
         </p:nvSpPr>
         <p:spPr>
           <a:xfrm>
-            <a:off x="10499483" y="5409438"/>
+            <a:off x="10499483" y="5190363"/>
             <a:ext cx="1088707" cy="237744"/>
           </a:xfrm>
           <a:prstGeom prst="roundRect">
@@ -45818,7 +45818,7 @@
         </p:nvSpPr>
         <p:spPr>
           <a:xfrm>
-            <a:off x="658368" y="5683758"/>
+            <a:off x="658368" y="5464682"/>
             <a:ext cx="10874959" cy="300990"/>
           </a:xfrm>
           <a:prstGeom prst="rect">
@@ -47892,7 +47892,7 @@
                 <a:cs typeface="Meiryo"/>
                 <a:ea typeface="Meiryo"/>
               </a:rPr>
-              <a:t>AIに日報の下書きを作らせるときの「指示文」を、法人ごとに書き換えられるようにする仕組みです。</a:t>
+              <a:t>AIに日報の下書きを作らせるときの指示文を、法人ごとに書き換えられる仕組みです。</a:t>
             </a:r>
           </a:p>
         </p:txBody>
@@ -50571,7 +50571,7 @@
                 <a:cs typeface="Meiryo"/>
                 <a:ea typeface="Meiryo"/>
               </a:rPr>
-              <a:t>保護者を追い詰めてしまうため避けたい言い回しがあれば挙げてください</a:t>
+              <a:t>保護者の負担になるため避けたい言い回しがあれば挙げてください</a:t>
             </a:r>
           </a:p>
         </p:txBody>
@@ -51366,7 +51366,7 @@
                 <a:cs typeface="Meiryo"/>
                 <a:ea typeface="Meiryo"/>
               </a:rPr>
-              <a:t>1円未満を持ちません。消費税の端数処理は決めた場所で1回だけ行い、Excelの表示桁で誤差が出るようなことは起きません。</a:t>
+              <a:t>1円未満は持ちません。消費税の端数処理は決めた場所で1回だけ行うので、Excelの表示桁による誤差は起きません。</a:t>
             </a:r>
           </a:p>
         </p:txBody>
@@ -51718,7 +51718,7 @@
                 <a:cs typeface="Meiryo"/>
                 <a:ea typeface="Meiryo"/>
               </a:rPr>
-              <a:t>領収書・請求書・予約は、訂正しても行を消しません。取り消しの印と理由を残します。「あったはずのものが痕跡なく消える」状態を作りません。</a:t>
+              <a:t>領収書・請求書・予約は、訂正しても行を消しません。取り消しの印と理由を残します。記録が痕跡なく消えることはありません。</a:t>
             </a:r>
           </a:p>
         </p:txBody>
@@ -52070,7 +52070,7 @@
                 <a:cs typeface="Meiryo"/>
                 <a:ea typeface="Meiryo"/>
               </a:rPr>
-              <a:t>入力する人が意識しなくても、いつ作られ、いつ直されたかが必ず残ります。</a:t>
+              <a:t>入力する人が意識しなくても、いつ作られ、いつ直されたかが残ります。</a:t>
             </a:r>
           </a:p>
         </p:txBody>
@@ -52204,7 +52204,7 @@
                 <a:cs typeface="Meiryo"/>
                 <a:ea typeface="Meiryo"/>
               </a:rPr>
-              <a:t>法人ごとに完全に分かれている</a:t>
+              <a:t>法人ごとに分かれている</a:t>
             </a:r>
           </a:p>
         </p:txBody>
@@ -52615,7 +52615,7 @@
                 <a:cs typeface="Meiryo"/>
                 <a:ea typeface="Meiryo"/>
               </a:rPr>
-              <a:t>実務でいちばん影響が出る2つの決めごとです</a:t>
+              <a:t>実務への影響が大きい2つの決めごとです</a:t>
             </a:r>
           </a:p>
         </p:txBody>
@@ -53156,7 +53156,7 @@
                 <a:cs typeface="Meiryo"/>
                 <a:ea typeface="Meiryo"/>
               </a:rPr>
-              <a:t>使った時点の割引率を、使用記録の側に控えとして持つ。マスタを直しても過去の請求額は1円も動かない。</a:t>
+              <a:t>使った時点の割引率を、使用記録の側に控えとして持つ。マスタを直しても過去の請求額は変わらない。</a:t>
             </a:r>
           </a:p>
           <a:p>
@@ -55442,7 +55442,7 @@
                 <a:cs typeface="Meiryo"/>
                 <a:ea typeface="Meiryo"/>
               </a:rPr>
-              <a:t>上の12件は、いずれも「業務の決めごと」であって、システムの都合ではありません。決まり次第、そのとおりに作ります。現時点で決まっているものがあれば教えてください。</a:t>
+              <a:t>上の12件は、いずれも業務の決めごとであって、システムの都合ではありません。決まり次第、そのとおりに作ります。現時点で決まっているものがあれば教えてください。</a:t>
             </a:r>
           </a:p>
         </p:txBody>
@@ -55546,7 +55546,7 @@
                 <a:cs typeface="Meiryo"/>
                 <a:ea typeface="Meiryo"/>
               </a:rPr>
-              <a:t>データベースは「Excelブック」だと思ってください</a:t>
+              <a:t>データベースとExcelの言葉の対応</a:t>
             </a:r>
             <a:r>
               <a:rPr sz="1250" b="0" i="0">
@@ -56751,7 +56751,7 @@
                           <a:cs typeface="Meiryo"/>
                           <a:ea typeface="Meiryo"/>
                         </a:rPr>
-                        <a:t>同じものが2件登録されることを、そもそも防ぐ</a:t>
+                        <a:t>同じものが2件登録されるのを防ぐ</a:t>
                       </a:r>
                     </a:p>
                   </a:txBody>
@@ -57019,7 +57019,7 @@
         <p:spPr>
           <a:xfrm>
             <a:off x="457200" y="5596128"/>
-            <a:ext cx="11277295" cy="661670"/>
+            <a:ext cx="11277295" cy="454279"/>
           </a:xfrm>
           <a:prstGeom prst="roundRect">
             <a:avLst>
@@ -57065,7 +57065,7 @@
         <p:spPr>
           <a:xfrm>
             <a:off x="457200" y="5596128"/>
-            <a:ext cx="68580" cy="661670"/>
+            <a:ext cx="68580" cy="454279"/>
           </a:xfrm>
           <a:prstGeom prst="rect">
             <a:avLst/>
@@ -57109,7 +57109,7 @@
         <p:spPr>
           <a:xfrm>
             <a:off x="658368" y="5715000"/>
-            <a:ext cx="10874959" cy="451357"/>
+            <a:ext cx="10874959" cy="243966"/>
           </a:xfrm>
           <a:prstGeom prst="rect">
             <a:avLst/>
@@ -57137,7 +57137,7 @@
                 <a:cs typeface="Meiryo"/>
                 <a:ea typeface="Meiryo"/>
               </a:rPr>
-              <a:t>以降のページでは、左の2列(Excelでいうと / この資料での呼び方)の言葉だけを使います。専門用語は、ご興味があるときのために括弧で添えるだけにします。</a:t>
+              <a:t>以降のページでは、左の2列(Excelでいうと / この資料での呼び方)の言葉だけを使います。専門用語は参考として括弧で添えるだけにします。</a:t>
             </a:r>
           </a:p>
         </p:txBody>
@@ -57970,7 +57970,7 @@
         <p:spPr>
           <a:xfrm>
             <a:off x="457200" y="3520440"/>
-            <a:ext cx="11277295" cy="1115948"/>
+            <a:ext cx="11277295" cy="908558"/>
           </a:xfrm>
           <a:prstGeom prst="roundRect">
             <a:avLst>
@@ -58016,7 +58016,7 @@
         <p:spPr>
           <a:xfrm>
             <a:off x="457200" y="3520440"/>
-            <a:ext cx="68580" cy="1115948"/>
+            <a:ext cx="68580" cy="908558"/>
           </a:xfrm>
           <a:prstGeom prst="rect">
             <a:avLst/>
@@ -58088,7 +58088,7 @@
                 <a:cs typeface="Meiryo"/>
                 <a:ea typeface="Meiryo"/>
               </a:rPr>
-              <a:t>「作りかけ」だからこそ、いま見ていただきたい</a:t>
+              <a:t>いまご確認いただきたい理由</a:t>
             </a:r>
           </a:p>
         </p:txBody>
@@ -58102,7 +58102,7 @@
         <p:spPr>
           <a:xfrm>
             <a:off x="658368" y="3886200"/>
-            <a:ext cx="10874959" cy="658748"/>
+            <a:ext cx="10874959" cy="451357"/>
           </a:xfrm>
           <a:prstGeom prst="rect">
             <a:avLst/>
@@ -58130,8 +58130,8 @@
                 <a:cs typeface="Meiryo"/>
                 <a:ea typeface="Meiryo"/>
               </a:rPr>
-              <a:t>右側の項目は、記録する場所(シートと見出し)だけを先に決めた状態です。画面も無く、データも1件も入っていないので、「この項目は要らない」「この項目が足りない」というご指摘を、いま反映するのがいちばん安く済みます。
-逆に、左側の「画面まで動くもの」も本番運用はまだ始めていないため、同じく変更できます。</a:t>
+              <a:t>右側の項目は、記録する場所(シートと見出し)だけを先に決めた状態です。画面も無く、データも入っていないので、「この項目は要らない」「この項目が足りない」というご指摘を、いまなら短時間で反映できます。
+左側の「画面まで動くもの」も本番運用は始めていないため、同じく変更できます。</a:t>
             </a:r>
           </a:p>
         </p:txBody>
@@ -59285,7 +59285,7 @@
                 <a:cs typeface="Meiryo"/>
                 <a:ea typeface="Meiryo"/>
               </a:rPr>
-              <a:t>Excelの見出し行を見るつもりでご覧ください。「この項目が無いと困る」が1つでもあれば、それが一番ありがたいご指摘です。</a:t>
+              <a:t>Excelの見出し行を見るつもりでご覧ください。「この項目が無いと困る」が1つでもあれば、お知らせください。</a:t>
             </a:r>
           </a:p>
         </p:txBody>
@@ -59761,7 +59761,7 @@
                 <a:cs typeface="Meiryo"/>
                 <a:ea typeface="Meiryo"/>
               </a:rPr>
-              <a:t>「そもそもこの業務はこうではない」といった前提のズレのご指摘が、いちばん大きな手戻りを防ぎます。</a:t>
+              <a:t>「この業務はそういうものではない」といった前提のズレのご指摘は、後の大きな手戻りを防ぎます。</a:t>
             </a:r>
           </a:p>
         </p:txBody>
@@ -59935,7 +59935,7 @@
                 <a:cs typeface="Meiryo"/>
                 <a:ea typeface="Meiryo"/>
               </a:rPr>
-              <a:t>時間が限られている場合は、第6章(予約)・第8章(領収書)・第11章(請求と入金)・第13章(移動と手当)の4つを優先してください。この4つは、決まっていないことが多く、かつ金額に直結するため、後から直すときの影響がいちばん大きい箇所です。</a:t>
+              <a:t>時間が限られている場合は、第6章(予約)・第8章(領収書)・第11章(請求と入金)・第13章(移動と手当)の4つを優先してください。この4つは、決まっていないことが多く、金額に直結するため、後から直すときの影響が大きい箇所です。</a:t>
             </a:r>
           </a:p>
         </p:txBody>
@@ -61783,7 +61783,7 @@
                 <a:cs typeface="Meiryo"/>
                 <a:ea typeface="Meiryo"/>
               </a:rPr>
-              <a:t>分量が多いので、章ごとに分けてご返信いただいても構いません。気づいた順にお送りいただくのがいちばん助かります。</a:t>
+              <a:t>分量が多いので、章ごとに分けてご返信いただいても構いません。気づいた順にお送りいただく形でも問題ありません。</a:t>
             </a:r>
           </a:p>
         </p:txBody>
@@ -62110,7 +62110,7 @@
                 <a:cs typeface="Meiryo"/>
                 <a:ea typeface="Meiryo"/>
               </a:rPr>
-              <a:t>この資料は何だったか</a:t>
+              <a:t>この資料の内容</a:t>
             </a:r>
           </a:p>
         </p:txBody>
@@ -63475,7 +63475,7 @@
                 <a:cs typeface="Meiryo"/>
                 <a:ea typeface="Meiryo"/>
               </a:rPr>
-              <a:t> — Excelの入力規則はコピー&amp;ペーストで簡単に破れる。システムでは破れない</a:t>
+              <a:t> — Excelの入力規則はコピー&amp;ペーストで破れる。システムでは破れない</a:t>
             </a:r>
           </a:p>
           <a:p>
@@ -63646,7 +63646,7 @@
                 <a:cs typeface="Meiryo"/>
                 <a:ea typeface="Meiryo"/>
               </a:rPr>
-              <a:t>記録として強くなること</a:t>
+              <a:t>記録として残ること</a:t>
             </a:r>
           </a:p>
         </p:txBody>
@@ -63706,7 +63706,7 @@
                 <a:cs typeface="Meiryo"/>
                 <a:ea typeface="Meiryo"/>
               </a:rPr>
-              <a:t> — 取り消しても行は残す(グレー表示)。「あったはずのものが痕跡なく消える」を作らない</a:t>
+              <a:t> — 取り消しても行は残す(グレー表示)。記録が痕跡なく消えることがない</a:t>
             </a:r>
           </a:p>
           <a:p>
@@ -63991,7 +63991,7 @@
                 <a:cs typeface="Meiryo"/>
                 <a:ea typeface="Meiryo"/>
               </a:rPr>
-              <a:t>項目(見出し)を足すのは、Excelのように「列を1本挿入」では済みません。作業と確認が必要で、運用開始後は入力済みのデータをどう埋めるかも決める必要があります。だからこそ、始める前のいまのうちに「足りない項目」を挙げていただきたい、というのがこの資料の趣旨です。</a:t>
+              <a:t>項目(見出し)を足すのは、Excelのように「列を1本挿入」では済みません。作業と確認が必要で、運用開始後は入力済みのデータをどう埋めるかも決める必要があります。そのため、運用を始める前に、足りない項目をご指摘ください。</a:t>
             </a:r>
           </a:p>
         </p:txBody>
@@ -65334,7 +65334,7 @@
                 <a:cs typeface="Meiryo"/>
                 <a:ea typeface="Meiryo"/>
               </a:rPr>
-              <a:t>。人の注意力に頼りません。</a:t>
+              <a:t>。登録の時点で止まります。</a:t>
             </a:r>
           </a:p>
         </p:txBody>
@@ -65466,7 +65466,7 @@
                 <a:cs typeface="Meiryo"/>
                 <a:ea typeface="Meiryo"/>
               </a:rPr>
-              <a:t>「つながり」が守ってくれること</a:t>
+              <a:t>つながりが防ぐこと</a:t>
             </a:r>
           </a:p>
         </p:txBody>
@@ -65508,8 +65508,8 @@
                 <a:cs typeface="Meiryo"/>
                 <a:ea typeface="Meiryo"/>
               </a:rPr>
-              <a:t>予約シートに、存在しない顧客の管理番号を書くことはできません。また、予約が残っている顧客を誤って削除することもできません。Excelでいえば「VLOOKUPが #N/A になる状態」を、そもそも作れないようにしてある、ということです。
-この仕組みのおかげで、「顧客名簿には無いのに日報だけ残っている」といった、あとから原因を追えない不整合が起きません。</a:t>
+              <a:t>予約シートに、存在しない顧客の管理番号を書くことはできません。また、予約が残っている顧客を誤って削除することもできません。Excelでいえば「VLOOKUPが #N/A になる状態」を作れないようにしてあります。
+これにより、顧客名簿には無いのに日報だけ残っているような、あとから原因を追えない不整合が起きません。</a:t>
             </a:r>
           </a:p>
         </p:txBody>
@@ -66387,7 +66387,7 @@
         <p:spPr>
           <a:xfrm>
             <a:off x="457200" y="4206240"/>
-            <a:ext cx="11277295" cy="1115948"/>
+            <a:ext cx="11277295" cy="908558"/>
           </a:xfrm>
           <a:prstGeom prst="roundRect">
             <a:avLst>
@@ -66433,7 +66433,7 @@
         <p:spPr>
           <a:xfrm>
             <a:off x="457200" y="4206240"/>
-            <a:ext cx="68580" cy="1115948"/>
+            <a:ext cx="68580" cy="908558"/>
           </a:xfrm>
           <a:prstGeom prst="rect">
             <a:avLst/>
@@ -66519,7 +66519,7 @@
         <p:spPr>
           <a:xfrm>
             <a:off x="658368" y="4572000"/>
-            <a:ext cx="10874959" cy="658748"/>
+            <a:ext cx="10874959" cy="451357"/>
           </a:xfrm>
           <a:prstGeom prst="rect">
             <a:avLst/>
@@ -66547,7 +66547,7 @@
                 <a:cs typeface="Meiryo"/>
                 <a:ea typeface="Meiryo"/>
               </a:rPr>
-              <a:t>画面に入力チェックを入れても、データの取り込み(CSV)、別のシステムからの連携、不具合の修正作業などは画面を通りません。「絶対に守りたいこと」はデータの置き場所そのものに書いておく、というのが今回の方針です。Excelの入力規則がコピー&amp;ペーストで破れてしまうのに対し、こちらは経路を問わず必ず効きます。</a:t>
+              <a:t>画面に入力チェックを入れても、データの取り込み(CSV)、別のシステムからの連携、不具合の修正作業などは画面を通りません。守りたい条件はデータの置き場所そのものに書いておく方針です。Excelの入力規則はコピー&amp;ペーストで破れますが、こちらは経路を問わず効きます。</a:t>
             </a:r>
           </a:p>
         </p:txBody>
@@ -66681,7 +66681,7 @@
                 <a:cs typeface="Meiryo"/>
                 <a:ea typeface="Meiryo"/>
               </a:rPr>
-              <a:t>ご確認いただきたいのは、まさにこの「選べる値」です</a:t>
+              <a:t>ご確認いただきたいのは「選べる値」の中身です</a:t>
             </a:r>
           </a:p>
         </p:txBody>
@@ -67006,7 +67006,7 @@
                 <a:cs typeface="Meiryo"/>
                 <a:ea typeface="Meiryo"/>
               </a:rPr>
-              <a:t>業務の流れのどこで、どのシートに記録が生まれるか</a:t>
+              <a:t>業務の流れのどこで、どのシートに記録が残るか</a:t>
             </a:r>
           </a:p>
         </p:txBody>
